--- a/public/fun/pack/pptx/birthday/돌잔치_15_첫번째이야기중심_수국화단.pptx
+++ b/public/fun/pack/pptx/birthday/돌잔치_15_첫번째이야기중심_수국화단.pptx
@@ -3347,7 +3347,7 @@
             <a:r>
               <a:rPr sz="4000" b="1" i="0">
                 <a:solidFill>
-                  <a:srgbClr val="47347F"/>
+                  <a:srgbClr val="24115F"/>
                 </a:solidFill>
               </a:rPr>
               <a:t>첫 번째 생일</a:t>
@@ -3385,7 +3385,7 @@
             <a:r>
               <a:rPr sz="1700" b="0" i="1">
                 <a:solidFill>
-                  <a:srgbClr val="47347F"/>
+                  <a:srgbClr val="24115F"/>
                 </a:solidFill>
               </a:rPr>
               <a:t>집에 처음 데려온 날 온 가족이 모였습니다</a:t>
@@ -3487,7 +3487,7 @@
             <a:avLst/>
           </a:prstGeom>
           <a:solidFill>
-            <a:srgbClr val="D9D2EF"/>
+            <a:srgbClr val="DBD1FA"/>
           </a:solidFill>
           <a:ln>
             <a:noFill/>
@@ -3516,7 +3516,7 @@
             <a:avLst/>
           </a:prstGeom>
           <a:solidFill>
-            <a:srgbClr val="745CBC"/>
+            <a:srgbClr val="4D26C5"/>
           </a:solidFill>
           <a:ln>
             <a:noFill/>
@@ -3560,7 +3560,7 @@
             <a:r>
               <a:rPr sz="3000" b="1" i="0">
                 <a:solidFill>
-                  <a:srgbClr val="47347F"/>
+                  <a:srgbClr val="24115F"/>
                 </a:solidFill>
               </a:rPr>
               <a:t>우리 아기를 소개합니다</a:t>
@@ -3585,11 +3585,11 @@
             </a:avLst>
           </a:prstGeom>
           <a:solidFill>
-            <a:srgbClr val="D9D2EF"/>
+            <a:srgbClr val="DBD1FA"/>
           </a:solidFill>
           <a:ln w="19050">
             <a:solidFill>
-              <a:srgbClr val="745CBC"/>
+              <a:srgbClr val="4D26C5"/>
             </a:solidFill>
             <a:prstDash val="dash"/>
           </a:ln>
@@ -3608,7 +3608,7 @@
             <a:r>
               <a:rPr sz="1400" b="0" i="0">
                 <a:solidFill>
-                  <a:srgbClr val="47347F"/>
+                  <a:srgbClr val="24115F"/>
                 </a:solidFill>
               </a:rPr>
               <a:t>아기 사진을 넣어 주세요</a:t>
@@ -3648,7 +3648,7 @@
                       <a:r>
                         <a:rPr sz="1500" b="1">
                           <a:solidFill>
-                            <a:srgbClr val="47347F"/>
+                            <a:srgbClr val="24115F"/>
                           </a:solidFill>
                         </a:rPr>
                         <a:t>이름</a:t>
@@ -3658,30 +3658,30 @@
                   <a:tcPr anchor="ctr" marL="73152" marR="73152">
                     <a:lnL w="9525" cap="flat" cmpd="sng" algn="ctr">
                       <a:solidFill>
-                        <a:srgbClr val="D9D2EF"/>
+                        <a:srgbClr val="DBD1FA"/>
                       </a:solidFill>
                       <a:prstDash val="solid"/>
                     </a:lnL>
                     <a:lnR w="9525" cap="flat" cmpd="sng" algn="ctr">
                       <a:solidFill>
-                        <a:srgbClr val="D9D2EF"/>
+                        <a:srgbClr val="DBD1FA"/>
                       </a:solidFill>
                       <a:prstDash val="solid"/>
                     </a:lnR>
                     <a:lnT w="9525" cap="flat" cmpd="sng" algn="ctr">
                       <a:solidFill>
-                        <a:srgbClr val="D9D2EF"/>
+                        <a:srgbClr val="DBD1FA"/>
                       </a:solidFill>
                       <a:prstDash val="solid"/>
                     </a:lnT>
                     <a:lnB w="9525" cap="flat" cmpd="sng" algn="ctr">
                       <a:solidFill>
-                        <a:srgbClr val="D9D2EF"/>
+                        <a:srgbClr val="DBD1FA"/>
                       </a:solidFill>
                       <a:prstDash val="solid"/>
                     </a:lnB>
                     <a:solidFill>
-                      <a:srgbClr val="D9D2EF"/>
+                      <a:srgbClr val="DBD1FA"/>
                     </a:solidFill>
                   </a:tcPr>
                 </a:tc>
@@ -3704,30 +3704,30 @@
                   <a:tcPr anchor="ctr" marL="73152" marR="73152">
                     <a:lnL w="9525" cap="flat" cmpd="sng" algn="ctr">
                       <a:solidFill>
-                        <a:srgbClr val="D9D2EF"/>
+                        <a:srgbClr val="DBD1FA"/>
                       </a:solidFill>
                       <a:prstDash val="solid"/>
                     </a:lnL>
                     <a:lnR w="9525" cap="flat" cmpd="sng" algn="ctr">
                       <a:solidFill>
-                        <a:srgbClr val="D9D2EF"/>
+                        <a:srgbClr val="DBD1FA"/>
                       </a:solidFill>
                       <a:prstDash val="solid"/>
                     </a:lnR>
                     <a:lnT w="9525" cap="flat" cmpd="sng" algn="ctr">
                       <a:solidFill>
-                        <a:srgbClr val="D9D2EF"/>
+                        <a:srgbClr val="DBD1FA"/>
                       </a:solidFill>
                       <a:prstDash val="solid"/>
                     </a:lnT>
                     <a:lnB w="9525" cap="flat" cmpd="sng" algn="ctr">
                       <a:solidFill>
-                        <a:srgbClr val="D9D2EF"/>
+                        <a:srgbClr val="DBD1FA"/>
                       </a:solidFill>
                       <a:prstDash val="solid"/>
                     </a:lnB>
                     <a:solidFill>
-                      <a:srgbClr val="F3F1F9"/>
+                      <a:srgbClr val="F1EEFC"/>
                     </a:solidFill>
                   </a:tcPr>
                 </a:tc>
@@ -3742,7 +3742,7 @@
                       <a:r>
                         <a:rPr sz="1500" b="1">
                           <a:solidFill>
-                            <a:srgbClr val="47347F"/>
+                            <a:srgbClr val="24115F"/>
                           </a:solidFill>
                         </a:rPr>
                         <a:t>생일</a:t>
@@ -3752,30 +3752,30 @@
                   <a:tcPr anchor="ctr" marL="73152" marR="73152">
                     <a:lnL w="9525" cap="flat" cmpd="sng" algn="ctr">
                       <a:solidFill>
-                        <a:srgbClr val="D9D2EF"/>
+                        <a:srgbClr val="DBD1FA"/>
                       </a:solidFill>
                       <a:prstDash val="solid"/>
                     </a:lnL>
                     <a:lnR w="9525" cap="flat" cmpd="sng" algn="ctr">
                       <a:solidFill>
-                        <a:srgbClr val="D9D2EF"/>
+                        <a:srgbClr val="DBD1FA"/>
                       </a:solidFill>
                       <a:prstDash val="solid"/>
                     </a:lnR>
                     <a:lnT w="9525" cap="flat" cmpd="sng" algn="ctr">
                       <a:solidFill>
-                        <a:srgbClr val="D9D2EF"/>
+                        <a:srgbClr val="DBD1FA"/>
                       </a:solidFill>
                       <a:prstDash val="solid"/>
                     </a:lnT>
                     <a:lnB w="9525" cap="flat" cmpd="sng" algn="ctr">
                       <a:solidFill>
-                        <a:srgbClr val="D9D2EF"/>
+                        <a:srgbClr val="DBD1FA"/>
                       </a:solidFill>
                       <a:prstDash val="solid"/>
                     </a:lnB>
                     <a:solidFill>
-                      <a:srgbClr val="D9D2EF"/>
+                      <a:srgbClr val="DBD1FA"/>
                     </a:solidFill>
                   </a:tcPr>
                 </a:tc>
@@ -3798,25 +3798,25 @@
                   <a:tcPr anchor="ctr" marL="73152" marR="73152">
                     <a:lnL w="9525" cap="flat" cmpd="sng" algn="ctr">
                       <a:solidFill>
-                        <a:srgbClr val="D9D2EF"/>
+                        <a:srgbClr val="DBD1FA"/>
                       </a:solidFill>
                       <a:prstDash val="solid"/>
                     </a:lnL>
                     <a:lnR w="9525" cap="flat" cmpd="sng" algn="ctr">
                       <a:solidFill>
-                        <a:srgbClr val="D9D2EF"/>
+                        <a:srgbClr val="DBD1FA"/>
                       </a:solidFill>
                       <a:prstDash val="solid"/>
                     </a:lnR>
                     <a:lnT w="9525" cap="flat" cmpd="sng" algn="ctr">
                       <a:solidFill>
-                        <a:srgbClr val="D9D2EF"/>
+                        <a:srgbClr val="DBD1FA"/>
                       </a:solidFill>
                       <a:prstDash val="solid"/>
                     </a:lnT>
                     <a:lnB w="9525" cap="flat" cmpd="sng" algn="ctr">
                       <a:solidFill>
-                        <a:srgbClr val="D9D2EF"/>
+                        <a:srgbClr val="DBD1FA"/>
                       </a:solidFill>
                       <a:prstDash val="solid"/>
                     </a:lnB>
@@ -3836,7 +3836,7 @@
                       <a:r>
                         <a:rPr sz="1500" b="1">
                           <a:solidFill>
-                            <a:srgbClr val="47347F"/>
+                            <a:srgbClr val="24115F"/>
                           </a:solidFill>
                         </a:rPr>
                         <a:t>키 · 몸무게</a:t>
@@ -3846,30 +3846,30 @@
                   <a:tcPr anchor="ctr" marL="73152" marR="73152">
                     <a:lnL w="9525" cap="flat" cmpd="sng" algn="ctr">
                       <a:solidFill>
-                        <a:srgbClr val="D9D2EF"/>
+                        <a:srgbClr val="DBD1FA"/>
                       </a:solidFill>
                       <a:prstDash val="solid"/>
                     </a:lnL>
                     <a:lnR w="9525" cap="flat" cmpd="sng" algn="ctr">
                       <a:solidFill>
-                        <a:srgbClr val="D9D2EF"/>
+                        <a:srgbClr val="DBD1FA"/>
                       </a:solidFill>
                       <a:prstDash val="solid"/>
                     </a:lnR>
                     <a:lnT w="9525" cap="flat" cmpd="sng" algn="ctr">
                       <a:solidFill>
-                        <a:srgbClr val="D9D2EF"/>
+                        <a:srgbClr val="DBD1FA"/>
                       </a:solidFill>
                       <a:prstDash val="solid"/>
                     </a:lnT>
                     <a:lnB w="9525" cap="flat" cmpd="sng" algn="ctr">
                       <a:solidFill>
-                        <a:srgbClr val="D9D2EF"/>
+                        <a:srgbClr val="DBD1FA"/>
                       </a:solidFill>
                       <a:prstDash val="solid"/>
                     </a:lnB>
                     <a:solidFill>
-                      <a:srgbClr val="D9D2EF"/>
+                      <a:srgbClr val="DBD1FA"/>
                     </a:solidFill>
                   </a:tcPr>
                 </a:tc>
@@ -3892,30 +3892,30 @@
                   <a:tcPr anchor="ctr" marL="73152" marR="73152">
                     <a:lnL w="9525" cap="flat" cmpd="sng" algn="ctr">
                       <a:solidFill>
-                        <a:srgbClr val="D9D2EF"/>
+                        <a:srgbClr val="DBD1FA"/>
                       </a:solidFill>
                       <a:prstDash val="solid"/>
                     </a:lnL>
                     <a:lnR w="9525" cap="flat" cmpd="sng" algn="ctr">
                       <a:solidFill>
-                        <a:srgbClr val="D9D2EF"/>
+                        <a:srgbClr val="DBD1FA"/>
                       </a:solidFill>
                       <a:prstDash val="solid"/>
                     </a:lnR>
                     <a:lnT w="9525" cap="flat" cmpd="sng" algn="ctr">
                       <a:solidFill>
-                        <a:srgbClr val="D9D2EF"/>
+                        <a:srgbClr val="DBD1FA"/>
                       </a:solidFill>
                       <a:prstDash val="solid"/>
                     </a:lnT>
                     <a:lnB w="9525" cap="flat" cmpd="sng" algn="ctr">
                       <a:solidFill>
-                        <a:srgbClr val="D9D2EF"/>
+                        <a:srgbClr val="DBD1FA"/>
                       </a:solidFill>
                       <a:prstDash val="solid"/>
                     </a:lnB>
                     <a:solidFill>
-                      <a:srgbClr val="F3F1F9"/>
+                      <a:srgbClr val="F1EEFC"/>
                     </a:solidFill>
                   </a:tcPr>
                 </a:tc>
@@ -3930,7 +3930,7 @@
                       <a:r>
                         <a:rPr sz="1500" b="1">
                           <a:solidFill>
-                            <a:srgbClr val="47347F"/>
+                            <a:srgbClr val="24115F"/>
                           </a:solidFill>
                         </a:rPr>
                         <a:t>좋아하는 것</a:t>
@@ -3940,30 +3940,30 @@
                   <a:tcPr anchor="ctr" marL="73152" marR="73152">
                     <a:lnL w="9525" cap="flat" cmpd="sng" algn="ctr">
                       <a:solidFill>
-                        <a:srgbClr val="D9D2EF"/>
+                        <a:srgbClr val="DBD1FA"/>
                       </a:solidFill>
                       <a:prstDash val="solid"/>
                     </a:lnL>
                     <a:lnR w="9525" cap="flat" cmpd="sng" algn="ctr">
                       <a:solidFill>
-                        <a:srgbClr val="D9D2EF"/>
+                        <a:srgbClr val="DBD1FA"/>
                       </a:solidFill>
                       <a:prstDash val="solid"/>
                     </a:lnR>
                     <a:lnT w="9525" cap="flat" cmpd="sng" algn="ctr">
                       <a:solidFill>
-                        <a:srgbClr val="D9D2EF"/>
+                        <a:srgbClr val="DBD1FA"/>
                       </a:solidFill>
                       <a:prstDash val="solid"/>
                     </a:lnT>
                     <a:lnB w="9525" cap="flat" cmpd="sng" algn="ctr">
                       <a:solidFill>
-                        <a:srgbClr val="D9D2EF"/>
+                        <a:srgbClr val="DBD1FA"/>
                       </a:solidFill>
                       <a:prstDash val="solid"/>
                     </a:lnB>
                     <a:solidFill>
-                      <a:srgbClr val="D9D2EF"/>
+                      <a:srgbClr val="DBD1FA"/>
                     </a:solidFill>
                   </a:tcPr>
                 </a:tc>
@@ -3986,25 +3986,25 @@
                   <a:tcPr anchor="ctr" marL="73152" marR="73152">
                     <a:lnL w="9525" cap="flat" cmpd="sng" algn="ctr">
                       <a:solidFill>
-                        <a:srgbClr val="D9D2EF"/>
+                        <a:srgbClr val="DBD1FA"/>
                       </a:solidFill>
                       <a:prstDash val="solid"/>
                     </a:lnL>
                     <a:lnR w="9525" cap="flat" cmpd="sng" algn="ctr">
                       <a:solidFill>
-                        <a:srgbClr val="D9D2EF"/>
+                        <a:srgbClr val="DBD1FA"/>
                       </a:solidFill>
                       <a:prstDash val="solid"/>
                     </a:lnR>
                     <a:lnT w="9525" cap="flat" cmpd="sng" algn="ctr">
                       <a:solidFill>
-                        <a:srgbClr val="D9D2EF"/>
+                        <a:srgbClr val="DBD1FA"/>
                       </a:solidFill>
                       <a:prstDash val="solid"/>
                     </a:lnT>
                     <a:lnB w="9525" cap="flat" cmpd="sng" algn="ctr">
                       <a:solidFill>
-                        <a:srgbClr val="D9D2EF"/>
+                        <a:srgbClr val="DBD1FA"/>
                       </a:solidFill>
                       <a:prstDash val="solid"/>
                     </a:lnB>
@@ -4024,7 +4024,7 @@
                       <a:r>
                         <a:rPr sz="1500" b="1">
                           <a:solidFill>
-                            <a:srgbClr val="47347F"/>
+                            <a:srgbClr val="24115F"/>
                           </a:solidFill>
                         </a:rPr>
                         <a:t>별명</a:t>
@@ -4034,30 +4034,30 @@
                   <a:tcPr anchor="ctr" marL="73152" marR="73152">
                     <a:lnL w="9525" cap="flat" cmpd="sng" algn="ctr">
                       <a:solidFill>
-                        <a:srgbClr val="D9D2EF"/>
+                        <a:srgbClr val="DBD1FA"/>
                       </a:solidFill>
                       <a:prstDash val="solid"/>
                     </a:lnL>
                     <a:lnR w="9525" cap="flat" cmpd="sng" algn="ctr">
                       <a:solidFill>
-                        <a:srgbClr val="D9D2EF"/>
+                        <a:srgbClr val="DBD1FA"/>
                       </a:solidFill>
                       <a:prstDash val="solid"/>
                     </a:lnR>
                     <a:lnT w="9525" cap="flat" cmpd="sng" algn="ctr">
                       <a:solidFill>
-                        <a:srgbClr val="D9D2EF"/>
+                        <a:srgbClr val="DBD1FA"/>
                       </a:solidFill>
                       <a:prstDash val="solid"/>
                     </a:lnT>
                     <a:lnB w="9525" cap="flat" cmpd="sng" algn="ctr">
                       <a:solidFill>
-                        <a:srgbClr val="D9D2EF"/>
+                        <a:srgbClr val="DBD1FA"/>
                       </a:solidFill>
                       <a:prstDash val="solid"/>
                     </a:lnB>
                     <a:solidFill>
-                      <a:srgbClr val="D9D2EF"/>
+                      <a:srgbClr val="DBD1FA"/>
                     </a:solidFill>
                   </a:tcPr>
                 </a:tc>
@@ -4080,30 +4080,30 @@
                   <a:tcPr anchor="ctr" marL="73152" marR="73152">
                     <a:lnL w="9525" cap="flat" cmpd="sng" algn="ctr">
                       <a:solidFill>
-                        <a:srgbClr val="D9D2EF"/>
+                        <a:srgbClr val="DBD1FA"/>
                       </a:solidFill>
                       <a:prstDash val="solid"/>
                     </a:lnL>
                     <a:lnR w="9525" cap="flat" cmpd="sng" algn="ctr">
                       <a:solidFill>
-                        <a:srgbClr val="D9D2EF"/>
+                        <a:srgbClr val="DBD1FA"/>
                       </a:solidFill>
                       <a:prstDash val="solid"/>
                     </a:lnR>
                     <a:lnT w="9525" cap="flat" cmpd="sng" algn="ctr">
                       <a:solidFill>
-                        <a:srgbClr val="D9D2EF"/>
+                        <a:srgbClr val="DBD1FA"/>
                       </a:solidFill>
                       <a:prstDash val="solid"/>
                     </a:lnT>
                     <a:lnB w="9525" cap="flat" cmpd="sng" algn="ctr">
                       <a:solidFill>
-                        <a:srgbClr val="D9D2EF"/>
+                        <a:srgbClr val="DBD1FA"/>
                       </a:solidFill>
                       <a:prstDash val="solid"/>
                     </a:lnB>
                     <a:solidFill>
-                      <a:srgbClr val="F3F1F9"/>
+                      <a:srgbClr val="F1EEFC"/>
                     </a:solidFill>
                   </a:tcPr>
                 </a:tc>
@@ -4118,7 +4118,7 @@
                       <a:r>
                         <a:rPr sz="1500" b="1">
                           <a:solidFill>
-                            <a:srgbClr val="47347F"/>
+                            <a:srgbClr val="24115F"/>
                           </a:solidFill>
                         </a:rPr>
                         <a:t>부모의 마음</a:t>
@@ -4128,30 +4128,30 @@
                   <a:tcPr anchor="ctr" marL="73152" marR="73152">
                     <a:lnL w="9525" cap="flat" cmpd="sng" algn="ctr">
                       <a:solidFill>
-                        <a:srgbClr val="D9D2EF"/>
+                        <a:srgbClr val="DBD1FA"/>
                       </a:solidFill>
                       <a:prstDash val="solid"/>
                     </a:lnL>
                     <a:lnR w="9525" cap="flat" cmpd="sng" algn="ctr">
                       <a:solidFill>
-                        <a:srgbClr val="D9D2EF"/>
+                        <a:srgbClr val="DBD1FA"/>
                       </a:solidFill>
                       <a:prstDash val="solid"/>
                     </a:lnR>
                     <a:lnT w="9525" cap="flat" cmpd="sng" algn="ctr">
                       <a:solidFill>
-                        <a:srgbClr val="D9D2EF"/>
+                        <a:srgbClr val="DBD1FA"/>
                       </a:solidFill>
                       <a:prstDash val="solid"/>
                     </a:lnT>
                     <a:lnB w="9525" cap="flat" cmpd="sng" algn="ctr">
                       <a:solidFill>
-                        <a:srgbClr val="D9D2EF"/>
+                        <a:srgbClr val="DBD1FA"/>
                       </a:solidFill>
                       <a:prstDash val="solid"/>
                     </a:lnB>
                     <a:solidFill>
-                      <a:srgbClr val="D9D2EF"/>
+                      <a:srgbClr val="DBD1FA"/>
                     </a:solidFill>
                   </a:tcPr>
                 </a:tc>
@@ -4174,25 +4174,25 @@
                   <a:tcPr anchor="ctr" marL="73152" marR="73152">
                     <a:lnL w="9525" cap="flat" cmpd="sng" algn="ctr">
                       <a:solidFill>
-                        <a:srgbClr val="D9D2EF"/>
+                        <a:srgbClr val="DBD1FA"/>
                       </a:solidFill>
                       <a:prstDash val="solid"/>
                     </a:lnL>
                     <a:lnR w="9525" cap="flat" cmpd="sng" algn="ctr">
                       <a:solidFill>
-                        <a:srgbClr val="D9D2EF"/>
+                        <a:srgbClr val="DBD1FA"/>
                       </a:solidFill>
                       <a:prstDash val="solid"/>
                     </a:lnR>
                     <a:lnT w="9525" cap="flat" cmpd="sng" algn="ctr">
                       <a:solidFill>
-                        <a:srgbClr val="D9D2EF"/>
+                        <a:srgbClr val="DBD1FA"/>
                       </a:solidFill>
                       <a:prstDash val="solid"/>
                     </a:lnT>
                     <a:lnB w="9525" cap="flat" cmpd="sng" algn="ctr">
                       <a:solidFill>
-                        <a:srgbClr val="D9D2EF"/>
+                        <a:srgbClr val="DBD1FA"/>
                       </a:solidFill>
                       <a:prstDash val="solid"/>
                     </a:lnB>
@@ -4247,7 +4247,7 @@
             <a:avLst/>
           </a:prstGeom>
           <a:solidFill>
-            <a:srgbClr val="D9D2EF"/>
+            <a:srgbClr val="DBD1FA"/>
           </a:solidFill>
           <a:ln>
             <a:noFill/>
@@ -4276,7 +4276,7 @@
             <a:avLst/>
           </a:prstGeom>
           <a:solidFill>
-            <a:srgbClr val="745CBC"/>
+            <a:srgbClr val="4D26C5"/>
           </a:solidFill>
           <a:ln>
             <a:noFill/>
@@ -4320,7 +4320,7 @@
             <a:r>
               <a:rPr sz="3000" b="1" i="0">
                 <a:solidFill>
-                  <a:srgbClr val="47347F"/>
+                  <a:srgbClr val="24115F"/>
                 </a:solidFill>
               </a:rPr>
               <a:t>태어난 날 이야기</a:t>
@@ -4343,7 +4343,7 @@
             <a:avLst/>
           </a:prstGeom>
           <a:solidFill>
-            <a:srgbClr val="D9D2EF"/>
+            <a:srgbClr val="DBD1FA"/>
           </a:solidFill>
           <a:ln>
             <a:noFill/>
@@ -4372,7 +4372,7 @@
             <a:avLst/>
           </a:prstGeom>
           <a:solidFill>
-            <a:srgbClr val="745CBC"/>
+            <a:srgbClr val="4D26C5"/>
           </a:solidFill>
           <a:ln w="38100">
             <a:solidFill>
@@ -4418,7 +4418,7 @@
             <a:r>
               <a:rPr sz="1600" b="1" i="0">
                 <a:solidFill>
-                  <a:srgbClr val="745CBC"/>
+                  <a:srgbClr val="4D26C5"/>
                 </a:solidFill>
               </a:rPr>
               <a:t>임신</a:t>
@@ -4456,7 +4456,7 @@
             <a:r>
               <a:rPr sz="1800" b="1" i="0">
                 <a:solidFill>
-                  <a:srgbClr val="47347F"/>
+                  <a:srgbClr val="24115F"/>
                 </a:solidFill>
               </a:rPr>
               <a:t>소식을 들은 날</a:t>
@@ -4517,7 +4517,7 @@
             <a:avLst/>
           </a:prstGeom>
           <a:solidFill>
-            <a:srgbClr val="745CBC"/>
+            <a:srgbClr val="4D26C5"/>
           </a:solidFill>
           <a:ln w="38100">
             <a:solidFill>
@@ -4563,7 +4563,7 @@
             <a:r>
               <a:rPr sz="1600" b="1" i="0">
                 <a:solidFill>
-                  <a:srgbClr val="745CBC"/>
+                  <a:srgbClr val="4D26C5"/>
                 </a:solidFill>
               </a:rPr>
               <a:t>출산</a:t>
@@ -4601,7 +4601,7 @@
             <a:r>
               <a:rPr sz="1800" b="1" i="0">
                 <a:solidFill>
-                  <a:srgbClr val="47347F"/>
+                  <a:srgbClr val="24115F"/>
                 </a:solidFill>
               </a:rPr>
               <a:t>태어난 날</a:t>
@@ -4662,7 +4662,7 @@
             <a:avLst/>
           </a:prstGeom>
           <a:solidFill>
-            <a:srgbClr val="745CBC"/>
+            <a:srgbClr val="4D26C5"/>
           </a:solidFill>
           <a:ln w="38100">
             <a:solidFill>
@@ -4708,7 +4708,7 @@
             <a:r>
               <a:rPr sz="1600" b="1" i="0">
                 <a:solidFill>
-                  <a:srgbClr val="745CBC"/>
+                  <a:srgbClr val="4D26C5"/>
                 </a:solidFill>
               </a:rPr>
               <a:t>첫 만남</a:t>
@@ -4746,7 +4746,7 @@
             <a:r>
               <a:rPr sz="1800" b="1" i="0">
                 <a:solidFill>
-                  <a:srgbClr val="47347F"/>
+                  <a:srgbClr val="24115F"/>
                 </a:solidFill>
               </a:rPr>
               <a:t>품에 안은 순간</a:t>
@@ -4807,7 +4807,7 @@
             <a:avLst/>
           </a:prstGeom>
           <a:solidFill>
-            <a:srgbClr val="745CBC"/>
+            <a:srgbClr val="4D26C5"/>
           </a:solidFill>
           <a:ln w="38100">
             <a:solidFill>
@@ -4853,7 +4853,7 @@
             <a:r>
               <a:rPr sz="1600" b="1" i="0">
                 <a:solidFill>
-                  <a:srgbClr val="745CBC"/>
+                  <a:srgbClr val="4D26C5"/>
                 </a:solidFill>
               </a:rPr>
               <a:t>집으로</a:t>
@@ -4891,7 +4891,7 @@
             <a:r>
               <a:rPr sz="1800" b="1" i="0">
                 <a:solidFill>
-                  <a:srgbClr val="47347F"/>
+                  <a:srgbClr val="24115F"/>
                 </a:solidFill>
               </a:rPr>
               <a:t>함께 돌아온 날</a:t>
@@ -4978,7 +4978,7 @@
             <a:avLst/>
           </a:prstGeom>
           <a:solidFill>
-            <a:srgbClr val="D9D2EF"/>
+            <a:srgbClr val="DBD1FA"/>
           </a:solidFill>
           <a:ln>
             <a:noFill/>
@@ -5007,7 +5007,7 @@
             <a:avLst/>
           </a:prstGeom>
           <a:solidFill>
-            <a:srgbClr val="745CBC"/>
+            <a:srgbClr val="4D26C5"/>
           </a:solidFill>
           <a:ln>
             <a:noFill/>
@@ -5051,7 +5051,7 @@
             <a:r>
               <a:rPr sz="3000" b="1" i="0">
                 <a:solidFill>
-                  <a:srgbClr val="47347F"/>
+                  <a:srgbClr val="24115F"/>
                 </a:solidFill>
               </a:rPr>
               <a:t>첫 번째 순간들</a:t>
@@ -5076,11 +5076,11 @@
             </a:avLst>
           </a:prstGeom>
           <a:solidFill>
-            <a:srgbClr val="F3F1F9"/>
+            <a:srgbClr val="F1EEFC"/>
           </a:solidFill>
           <a:ln w="15875">
             <a:solidFill>
-              <a:srgbClr val="D9D2EF"/>
+              <a:srgbClr val="DBD1FA"/>
             </a:solidFill>
           </a:ln>
         </p:spPr>
@@ -5107,7 +5107,7 @@
             <a:avLst/>
           </a:prstGeom>
           <a:solidFill>
-            <a:srgbClr val="745CBC"/>
+            <a:srgbClr val="4D26C5"/>
           </a:solidFill>
           <a:ln>
             <a:noFill/>
@@ -5165,7 +5165,7 @@
             <a:r>
               <a:rPr sz="1800" b="1" i="0">
                 <a:solidFill>
-                  <a:srgbClr val="47347F"/>
+                  <a:srgbClr val="24115F"/>
                 </a:solidFill>
               </a:rPr>
               <a:t>첫 웃음</a:t>
@@ -5228,11 +5228,11 @@
             </a:avLst>
           </a:prstGeom>
           <a:solidFill>
-            <a:srgbClr val="F3F1F9"/>
+            <a:srgbClr val="F1EEFC"/>
           </a:solidFill>
           <a:ln w="15875">
             <a:solidFill>
-              <a:srgbClr val="D9D2EF"/>
+              <a:srgbClr val="DBD1FA"/>
             </a:solidFill>
           </a:ln>
         </p:spPr>
@@ -5259,7 +5259,7 @@
             <a:avLst/>
           </a:prstGeom>
           <a:solidFill>
-            <a:srgbClr val="745CBC"/>
+            <a:srgbClr val="4D26C5"/>
           </a:solidFill>
           <a:ln>
             <a:noFill/>
@@ -5317,7 +5317,7 @@
             <a:r>
               <a:rPr sz="1800" b="1" i="0">
                 <a:solidFill>
-                  <a:srgbClr val="47347F"/>
+                  <a:srgbClr val="24115F"/>
                 </a:solidFill>
               </a:rPr>
               <a:t>첫 뒤집기</a:t>
@@ -5380,11 +5380,11 @@
             </a:avLst>
           </a:prstGeom>
           <a:solidFill>
-            <a:srgbClr val="F3F1F9"/>
+            <a:srgbClr val="F1EEFC"/>
           </a:solidFill>
           <a:ln w="15875">
             <a:solidFill>
-              <a:srgbClr val="D9D2EF"/>
+              <a:srgbClr val="DBD1FA"/>
             </a:solidFill>
           </a:ln>
         </p:spPr>
@@ -5411,7 +5411,7 @@
             <a:avLst/>
           </a:prstGeom>
           <a:solidFill>
-            <a:srgbClr val="745CBC"/>
+            <a:srgbClr val="4D26C5"/>
           </a:solidFill>
           <a:ln>
             <a:noFill/>
@@ -5469,7 +5469,7 @@
             <a:r>
               <a:rPr sz="1800" b="1" i="0">
                 <a:solidFill>
-                  <a:srgbClr val="47347F"/>
+                  <a:srgbClr val="24115F"/>
                 </a:solidFill>
               </a:rPr>
               <a:t>첫 이</a:t>
@@ -5532,11 +5532,11 @@
             </a:avLst>
           </a:prstGeom>
           <a:solidFill>
-            <a:srgbClr val="F3F1F9"/>
+            <a:srgbClr val="F1EEFC"/>
           </a:solidFill>
           <a:ln w="15875">
             <a:solidFill>
-              <a:srgbClr val="D9D2EF"/>
+              <a:srgbClr val="DBD1FA"/>
             </a:solidFill>
           </a:ln>
         </p:spPr>
@@ -5563,7 +5563,7 @@
             <a:avLst/>
           </a:prstGeom>
           <a:solidFill>
-            <a:srgbClr val="745CBC"/>
+            <a:srgbClr val="4D26C5"/>
           </a:solidFill>
           <a:ln>
             <a:noFill/>
@@ -5621,7 +5621,7 @@
             <a:r>
               <a:rPr sz="1800" b="1" i="0">
                 <a:solidFill>
-                  <a:srgbClr val="47347F"/>
+                  <a:srgbClr val="24115F"/>
                 </a:solidFill>
               </a:rPr>
               <a:t>첫 걸음</a:t>
@@ -5708,7 +5708,7 @@
             <a:avLst/>
           </a:prstGeom>
           <a:solidFill>
-            <a:srgbClr val="D9D2EF"/>
+            <a:srgbClr val="DBD1FA"/>
           </a:solidFill>
           <a:ln>
             <a:noFill/>
@@ -5737,7 +5737,7 @@
             <a:avLst/>
           </a:prstGeom>
           <a:solidFill>
-            <a:srgbClr val="745CBC"/>
+            <a:srgbClr val="4D26C5"/>
           </a:solidFill>
           <a:ln>
             <a:noFill/>
@@ -5781,7 +5781,7 @@
             <a:r>
               <a:rPr sz="3000" b="1" i="0">
                 <a:solidFill>
-                  <a:srgbClr val="47347F"/>
+                  <a:srgbClr val="24115F"/>
                 </a:solidFill>
               </a:rPr>
               <a:t>사진 모음</a:t>
@@ -5806,11 +5806,11 @@
             </a:avLst>
           </a:prstGeom>
           <a:solidFill>
-            <a:srgbClr val="D9D2EF"/>
+            <a:srgbClr val="DBD1FA"/>
           </a:solidFill>
           <a:ln w="19050">
             <a:solidFill>
-              <a:srgbClr val="745CBC"/>
+              <a:srgbClr val="4D26C5"/>
             </a:solidFill>
             <a:prstDash val="dash"/>
           </a:ln>
@@ -5829,7 +5829,7 @@
             <a:r>
               <a:rPr sz="1200" b="0" i="0">
                 <a:solidFill>
-                  <a:srgbClr val="47347F"/>
+                  <a:srgbClr val="24115F"/>
                 </a:solidFill>
               </a:rPr>
               <a:t>사진 1</a:t>
@@ -5854,11 +5854,11 @@
             </a:avLst>
           </a:prstGeom>
           <a:solidFill>
-            <a:srgbClr val="D9D2EF"/>
+            <a:srgbClr val="DBD1FA"/>
           </a:solidFill>
           <a:ln w="19050">
             <a:solidFill>
-              <a:srgbClr val="745CBC"/>
+              <a:srgbClr val="4D26C5"/>
             </a:solidFill>
             <a:prstDash val="dash"/>
           </a:ln>
@@ -5877,7 +5877,7 @@
             <a:r>
               <a:rPr sz="1200" b="0" i="0">
                 <a:solidFill>
-                  <a:srgbClr val="47347F"/>
+                  <a:srgbClr val="24115F"/>
                 </a:solidFill>
               </a:rPr>
               <a:t>사진 2</a:t>
@@ -5902,11 +5902,11 @@
             </a:avLst>
           </a:prstGeom>
           <a:solidFill>
-            <a:srgbClr val="D9D2EF"/>
+            <a:srgbClr val="DBD1FA"/>
           </a:solidFill>
           <a:ln w="19050">
             <a:solidFill>
-              <a:srgbClr val="745CBC"/>
+              <a:srgbClr val="4D26C5"/>
             </a:solidFill>
             <a:prstDash val="dash"/>
           </a:ln>
@@ -5925,7 +5925,7 @@
             <a:r>
               <a:rPr sz="1200" b="0" i="0">
                 <a:solidFill>
-                  <a:srgbClr val="47347F"/>
+                  <a:srgbClr val="24115F"/>
                 </a:solidFill>
               </a:rPr>
               <a:t>사진 3</a:t>
@@ -5950,11 +5950,11 @@
             </a:avLst>
           </a:prstGeom>
           <a:solidFill>
-            <a:srgbClr val="D9D2EF"/>
+            <a:srgbClr val="DBD1FA"/>
           </a:solidFill>
           <a:ln w="19050">
             <a:solidFill>
-              <a:srgbClr val="745CBC"/>
+              <a:srgbClr val="4D26C5"/>
             </a:solidFill>
             <a:prstDash val="dash"/>
           </a:ln>
@@ -5973,7 +5973,7 @@
             <a:r>
               <a:rPr sz="1200" b="0" i="0">
                 <a:solidFill>
-                  <a:srgbClr val="47347F"/>
+                  <a:srgbClr val="24115F"/>
                 </a:solidFill>
               </a:rPr>
               <a:t>사진 4</a:t>
@@ -5998,11 +5998,11 @@
             </a:avLst>
           </a:prstGeom>
           <a:solidFill>
-            <a:srgbClr val="D9D2EF"/>
+            <a:srgbClr val="DBD1FA"/>
           </a:solidFill>
           <a:ln w="19050">
             <a:solidFill>
-              <a:srgbClr val="745CBC"/>
+              <a:srgbClr val="4D26C5"/>
             </a:solidFill>
             <a:prstDash val="dash"/>
           </a:ln>
@@ -6021,7 +6021,7 @@
             <a:r>
               <a:rPr sz="1200" b="0" i="0">
                 <a:solidFill>
-                  <a:srgbClr val="47347F"/>
+                  <a:srgbClr val="24115F"/>
                 </a:solidFill>
               </a:rPr>
               <a:t>사진 5</a:t>
@@ -6046,11 +6046,11 @@
             </a:avLst>
           </a:prstGeom>
           <a:solidFill>
-            <a:srgbClr val="D9D2EF"/>
+            <a:srgbClr val="DBD1FA"/>
           </a:solidFill>
           <a:ln w="19050">
             <a:solidFill>
-              <a:srgbClr val="745CBC"/>
+              <a:srgbClr val="4D26C5"/>
             </a:solidFill>
             <a:prstDash val="dash"/>
           </a:ln>
@@ -6069,7 +6069,7 @@
             <a:r>
               <a:rPr sz="1200" b="0" i="0">
                 <a:solidFill>
-                  <a:srgbClr val="47347F"/>
+                  <a:srgbClr val="24115F"/>
                 </a:solidFill>
               </a:rPr>
               <a:t>사진 6</a:t>
@@ -6094,11 +6094,11 @@
             </a:avLst>
           </a:prstGeom>
           <a:solidFill>
-            <a:srgbClr val="D9D2EF"/>
+            <a:srgbClr val="DBD1FA"/>
           </a:solidFill>
           <a:ln w="19050">
             <a:solidFill>
-              <a:srgbClr val="745CBC"/>
+              <a:srgbClr val="4D26C5"/>
             </a:solidFill>
             <a:prstDash val="dash"/>
           </a:ln>
@@ -6117,7 +6117,7 @@
             <a:r>
               <a:rPr sz="1200" b="0" i="0">
                 <a:solidFill>
-                  <a:srgbClr val="47347F"/>
+                  <a:srgbClr val="24115F"/>
                 </a:solidFill>
               </a:rPr>
               <a:t>사진 7</a:t>
@@ -6142,11 +6142,11 @@
             </a:avLst>
           </a:prstGeom>
           <a:solidFill>
-            <a:srgbClr val="D9D2EF"/>
+            <a:srgbClr val="DBD1FA"/>
           </a:solidFill>
           <a:ln w="19050">
             <a:solidFill>
-              <a:srgbClr val="745CBC"/>
+              <a:srgbClr val="4D26C5"/>
             </a:solidFill>
             <a:prstDash val="dash"/>
           </a:ln>
@@ -6165,7 +6165,7 @@
             <a:r>
               <a:rPr sz="1200" b="0" i="0">
                 <a:solidFill>
-                  <a:srgbClr val="47347F"/>
+                  <a:srgbClr val="24115F"/>
                 </a:solidFill>
               </a:rPr>
               <a:t>사진 8</a:t>
@@ -6245,7 +6245,7 @@
             <a:r>
               <a:rPr sz="3400" b="1" i="0">
                 <a:solidFill>
-                  <a:srgbClr val="47347F"/>
+                  <a:srgbClr val="24115F"/>
                 </a:solidFill>
               </a:rPr>
               <a:t>와 주셔서 고맙습니다</a:t>
@@ -6283,7 +6283,7 @@
             <a:r>
               <a:rPr sz="1700" b="0" i="1">
                 <a:solidFill>
-                  <a:srgbClr val="47347F"/>
+                  <a:srgbClr val="24115F"/>
                 </a:solidFill>
               </a:rPr>
               <a:t>아이가 한 살이 되었습니다</a:t>
@@ -6348,34 +6348,34 @@
         <a:sysClr val="window" lastClr="FFFFFF"/>
       </a:lt1>
       <a:dk2>
-        <a:srgbClr val="47347F"/>
+        <a:srgbClr val="24115F"/>
       </a:dk2>
       <a:lt2>
-        <a:srgbClr val="F3F1F9"/>
+        <a:srgbClr val="F1EEFC"/>
       </a:lt2>
       <a:accent1>
-        <a:srgbClr val="745CBC"/>
+        <a:srgbClr val="4D26C5"/>
       </a:accent1>
       <a:accent2>
-        <a:srgbClr val="917B3B"/>
+        <a:srgbClr val="209DB6"/>
       </a:accent2>
       <a:accent3>
-        <a:srgbClr val="47347F"/>
+        <a:srgbClr val="24115F"/>
       </a:accent3>
       <a:accent4>
-        <a:srgbClr val="D9D2EF"/>
+        <a:srgbClr val="DBD1FA"/>
       </a:accent4>
       <a:accent5>
-        <a:srgbClr val="826C7C"/>
+        <a:srgbClr val="3662BE"/>
       </a:accent5>
       <a:accent6>
-        <a:srgbClr val="9185B2"/>
+        <a:srgbClr val="7C709F"/>
       </a:accent6>
       <a:hlink>
-        <a:srgbClr val="745CBC"/>
+        <a:srgbClr val="4D26C5"/>
       </a:hlink>
       <a:folHlink>
-        <a:srgbClr val="47347F"/>
+        <a:srgbClr val="24115F"/>
       </a:folHlink>
     </a:clrScheme>
     <a:fontScheme name="Office">

--- a/public/fun/pack/pptx/birthday/돌잔치_15_첫번째이야기중심_수국화단.pptx
+++ b/public/fun/pack/pptx/birthday/돌잔치_15_첫번째이야기중심_수국화단.pptx
@@ -3286,6 +3286,14 @@
 <file path=ppt/slides/slide1.xml><?xml version="1.0" encoding="utf-8"?>
 <p:sld xmlns:a="http://schemas.openxmlformats.org/drawingml/2006/main" xmlns:p="http://schemas.openxmlformats.org/presentationml/2006/main" xmlns:r="http://schemas.openxmlformats.org/officeDocument/2006/relationships">
   <p:cSld>
+    <p:bg>
+      <p:bgPr>
+        <a:solidFill>
+          <a:srgbClr val="EFEAFD"/>
+        </a:solidFill>
+        <a:effectLst/>
+      </p:bgPr>
+    </p:bg>
     <p:spTree>
       <p:nvGrpSpPr>
         <p:cNvPr id="1" name=""/>
@@ -3293,30 +3301,119 @@
         <p:nvPr/>
       </p:nvGrpSpPr>
       <p:grpSpPr/>
-      <p:pic>
-        <p:nvPicPr>
-          <p:cNvPr id="3" name="표지 그림" descr="birthday-15.jpg"/>
-          <p:cNvPicPr>
-            <a:picLocks noChangeAspect="1"/>
-          </p:cNvPicPr>
+      <p:sp>
+        <p:nvSpPr>
+          <p:cNvPr id="3" name="사진 자리"/>
+          <p:cNvSpPr/>
           <p:nvPr/>
-        </p:nvPicPr>
-        <p:blipFill>
-          <a:blip r:embed="rId2"/>
-          <a:stretch>
-            <a:fillRect/>
-          </a:stretch>
-        </p:blipFill>
-        <p:spPr>
-          <a:xfrm>
-            <a:off x="0" y="0"/>
-            <a:ext cx="12191695" cy="6858000"/>
+        </p:nvSpPr>
+        <p:spPr>
+          <a:xfrm>
+            <a:off x="1463003" y="685800"/>
+            <a:ext cx="3169840" cy="5486400"/>
+          </a:xfrm>
+          <a:prstGeom prst="round2SameRect">
+            <a:avLst>
+              <a:gd name="adj1" fmla="val 50000"/>
+              <a:gd name="adj2" fmla="val 0"/>
+            </a:avLst>
+          </a:prstGeom>
+          <a:solidFill>
+            <a:srgbClr val="B8A5F3"/>
+          </a:solidFill>
+          <a:ln>
+            <a:noFill/>
+          </a:ln>
+        </p:spPr>
+        <p:txBody>
+          <a:bodyPr rtlCol="0" anchor="ctr" wrap="square" lIns="54864" rIns="54864" tIns="27432" bIns="27432">
+            <a:noAutofit/>
+          </a:bodyPr>
+          <a:lstStyle/>
+          <a:p>
+            <a:pPr algn="ctr">
+              <a:lnSpc>
+                <a:spcPct val="100000"/>
+              </a:lnSpc>
+            </a:pPr>
+            <a:r>
+              <a:rPr sz="1400" b="0" i="0">
+                <a:solidFill>
+                  <a:srgbClr val="302749"/>
+                </a:solidFill>
+              </a:rPr>
+              <a:t>사진을 넣어 주세요</a:t>
+            </a:r>
+          </a:p>
+        </p:txBody>
+      </p:sp>
+      <p:sp>
+        <p:nvSpPr>
+          <p:cNvPr id="4" name="장식"/>
+          <p:cNvSpPr/>
+          <p:nvPr/>
+        </p:nvSpPr>
+        <p:spPr>
+          <a:xfrm>
+            <a:off x="4358505" y="4251960"/>
+            <a:ext cx="1005840" cy="1005840"/>
+          </a:xfrm>
+          <a:prstGeom prst="ellipse">
+            <a:avLst/>
+          </a:prstGeom>
+          <a:solidFill>
+            <a:srgbClr val="B8A5F3"/>
+          </a:solidFill>
+          <a:ln>
+            <a:noFill/>
+          </a:ln>
+        </p:spPr>
+        <p:txBody>
+          <a:bodyPr rtlCol="0" anchor="ctr"/>
+          <a:lstStyle/>
+          <a:p>
+            <a:pPr algn="ctr"/>
+          </a:p>
+        </p:txBody>
+      </p:sp>
+      <p:sp>
+        <p:nvSpPr>
+          <p:cNvPr id="5" name="라벨"/>
+          <p:cNvSpPr txBox="1"/>
+          <p:nvPr/>
+        </p:nvSpPr>
+        <p:spPr>
+          <a:xfrm>
+            <a:off x="6827349" y="2148840"/>
+            <a:ext cx="4632844" cy="274320"/>
           </a:xfrm>
           <a:prstGeom prst="rect">
             <a:avLst/>
           </a:prstGeom>
-        </p:spPr>
-      </p:pic>
+          <a:noFill/>
+        </p:spPr>
+        <p:txBody>
+          <a:bodyPr wrap="square" lIns="54864" rIns="54864" tIns="27432" bIns="27432" anchor="t">
+            <a:noAutofit/>
+          </a:bodyPr>
+          <a:lstStyle/>
+          <a:p>
+            <a:pPr algn="l">
+              <a:lnSpc>
+                <a:spcPct val="115000"/>
+              </a:lnSpc>
+            </a:pPr>
+            <a:r>
+              <a:rPr sz="1000" b="1" i="0" spc="250">
+                <a:solidFill>
+                  <a:srgbClr val="26231F"/>
+                </a:solidFill>
+              </a:rPr>
+              <a:t>FIRST BIRTHDAY</a:t>
+            </a:r>
+          </a:p>
+        </p:txBody>
+      </p:sp>
       <p:sp>
         <p:nvSpPr>
           <p:cNvPr id="2" name="Title 1"/>
@@ -3329,8 +3426,8 @@
         </p:nvSpPr>
         <p:spPr>
           <a:xfrm>
-            <a:off x="853418" y="2057400"/>
-            <a:ext cx="6095847" cy="1554480"/>
+            <a:off x="6827349" y="2606040"/>
+            <a:ext cx="4632844" cy="1188720"/>
           </a:xfrm>
         </p:spPr>
         <p:txBody>
@@ -3347,7 +3444,7 @@
             <a:r>
               <a:rPr sz="4000" b="1" i="0">
                 <a:solidFill>
-                  <a:srgbClr val="24115F"/>
+                  <a:srgbClr val="26231F"/>
                 </a:solidFill>
               </a:rPr>
               <a:t>첫 번째 생일</a:t>
@@ -3357,14 +3454,14 @@
       </p:sp>
       <p:sp>
         <p:nvSpPr>
-          <p:cNvPr id="4" name="한 줄 문구"/>
+          <p:cNvPr id="6" name="한 줄 문구"/>
           <p:cNvSpPr txBox="1"/>
           <p:nvPr/>
         </p:nvSpPr>
         <p:spPr>
           <a:xfrm>
-            <a:off x="853418" y="3749039"/>
-            <a:ext cx="6095847" cy="822960"/>
+            <a:off x="6827349" y="3886200"/>
+            <a:ext cx="4632844" cy="822960"/>
           </a:xfrm>
           <a:prstGeom prst="rect">
             <a:avLst/>
@@ -3383,9 +3480,9 @@
               </a:lnSpc>
             </a:pPr>
             <a:r>
-              <a:rPr sz="1700" b="0" i="1">
-                <a:solidFill>
-                  <a:srgbClr val="24115F"/>
+              <a:rPr sz="1700" b="0" i="0">
+                <a:solidFill>
+                  <a:srgbClr val="26231F"/>
                 </a:solidFill>
               </a:rPr>
               <a:t>집에 처음 데려온 날 온 가족이 모였습니다</a:t>
@@ -3395,14 +3492,14 @@
       </p:sp>
       <p:sp>
         <p:nvSpPr>
-          <p:cNvPr id="5" name="안내 문구"/>
+          <p:cNvPr id="7" name="안내 문구"/>
           <p:cNvSpPr txBox="1"/>
           <p:nvPr/>
         </p:nvSpPr>
         <p:spPr>
           <a:xfrm>
-            <a:off x="853418" y="4617720"/>
-            <a:ext cx="6095847" cy="914400"/>
+            <a:off x="6827349" y="4754880"/>
+            <a:ext cx="4632844" cy="914400"/>
           </a:xfrm>
           <a:prstGeom prst="rect">
             <a:avLst/>
@@ -3423,10 +3520,10 @@
             <a:r>
               <a:rPr sz="1400" b="0" i="0">
                 <a:solidFill>
-                  <a:srgbClr val="666666"/>
+                  <a:srgbClr val="26231F"/>
                 </a:solidFill>
               </a:rPr>
-              <a:t>아기 이름 · 2027. 00. 00</a:t>
+              <a:t>아기 이름 · 날짜 입력</a:t>
             </a:r>
           </a:p>
           <a:p>
@@ -3438,7 +3535,7 @@
             <a:r>
               <a:rPr sz="1400" b="0" i="0">
                 <a:solidFill>
-                  <a:srgbClr val="666666"/>
+                  <a:srgbClr val="26231F"/>
                 </a:solidFill>
               </a:rPr>
               <a:t>장소를 입력하세요</a:t>
@@ -3480,14 +3577,14 @@
         </p:nvSpPr>
         <p:spPr>
           <a:xfrm>
-            <a:off x="-182880" y="6144768"/>
-            <a:ext cx="12557455" cy="731520"/>
-          </a:xfrm>
-          <a:prstGeom prst="wave">
+            <a:off x="640080" y="566928"/>
+            <a:ext cx="10911535" cy="10972"/>
+          </a:xfrm>
+          <a:prstGeom prst="rect">
             <a:avLst/>
           </a:prstGeom>
           <a:solidFill>
-            <a:srgbClr val="DBD1FA"/>
+            <a:srgbClr val="26231F"/>
           </a:solidFill>
           <a:ln>
             <a:noFill/>
@@ -3503,20 +3600,58 @@
       </p:sp>
       <p:sp>
         <p:nvSpPr>
-          <p:cNvPr id="4" name="장식"/>
+          <p:cNvPr id="4" name="상단 라벨"/>
+          <p:cNvSpPr txBox="1"/>
+          <p:nvPr/>
+        </p:nvSpPr>
+        <p:spPr>
+          <a:xfrm>
+            <a:off x="640080" y="237744"/>
+            <a:ext cx="5486400" cy="274320"/>
+          </a:xfrm>
+          <a:prstGeom prst="rect">
+            <a:avLst/>
+          </a:prstGeom>
+          <a:noFill/>
+        </p:spPr>
+        <p:txBody>
+          <a:bodyPr wrap="square" lIns="54864" rIns="54864" tIns="27432" bIns="27432" anchor="ctr">
+            <a:noAutofit/>
+          </a:bodyPr>
+          <a:lstStyle/>
+          <a:p>
+            <a:pPr algn="l">
+              <a:lnSpc>
+                <a:spcPct val="115000"/>
+              </a:lnSpc>
+            </a:pPr>
+            <a:r>
+              <a:rPr sz="900" b="1" i="0" spc="250">
+                <a:solidFill>
+                  <a:srgbClr val="26231F"/>
+                </a:solidFill>
+              </a:rPr>
+              <a:t>FIRST BIRTHDAY</a:t>
+            </a:r>
+          </a:p>
+        </p:txBody>
+      </p:sp>
+      <p:sp>
+        <p:nvSpPr>
+          <p:cNvPr id="5" name="포인트"/>
           <p:cNvSpPr/>
           <p:nvPr/>
         </p:nvSpPr>
         <p:spPr>
-          <a:xfrm>
-            <a:off x="-182880" y="6400800"/>
-            <a:ext cx="12557455" cy="502920"/>
-          </a:xfrm>
-          <a:prstGeom prst="wave">
+          <a:xfrm rot="18900000">
+            <a:off x="11204143" y="246888"/>
+            <a:ext cx="237744" cy="237744"/>
+          </a:xfrm>
+          <a:prstGeom prst="teardrop">
             <a:avLst/>
           </a:prstGeom>
           <a:solidFill>
-            <a:srgbClr val="4D26C5"/>
+            <a:srgbClr val="977BEA"/>
           </a:solidFill>
           <a:ln>
             <a:noFill/>
@@ -3542,8 +3677,8 @@
         </p:nvSpPr>
         <p:spPr>
           <a:xfrm>
-            <a:off x="640080" y="457200"/>
-            <a:ext cx="9722815" cy="868680"/>
+            <a:off x="640080" y="731520"/>
+            <a:ext cx="10911535" cy="822960"/>
           </a:xfrm>
         </p:spPr>
         <p:txBody>
@@ -3560,7 +3695,7 @@
             <a:r>
               <a:rPr sz="3000" b="1" i="0">
                 <a:solidFill>
-                  <a:srgbClr val="24115F"/>
+                  <a:srgbClr val="26231F"/>
                 </a:solidFill>
               </a:rPr>
               <a:t>우리 아기를 소개합니다</a:t>
@@ -3570,14 +3705,14 @@
       </p:sp>
       <p:sp>
         <p:nvSpPr>
-          <p:cNvPr id="5" name="사진 자리"/>
+          <p:cNvPr id="6" name="사진 자리"/>
           <p:cNvSpPr/>
           <p:nvPr/>
         </p:nvSpPr>
         <p:spPr>
           <a:xfrm>
-            <a:off x="640080" y="1554480"/>
-            <a:ext cx="3840480" cy="4206240"/>
+            <a:off x="640080" y="1783080"/>
+            <a:ext cx="3840480" cy="4389120"/>
           </a:xfrm>
           <a:prstGeom prst="roundRect">
             <a:avLst>
@@ -3588,9 +3723,7 @@
             <a:srgbClr val="DBD1FA"/>
           </a:solidFill>
           <a:ln w="19050">
-            <a:solidFill>
-              <a:srgbClr val="4D26C5"/>
-            </a:solidFill>
+            <a:noFill/>
             <a:prstDash val="dash"/>
           </a:ln>
         </p:spPr>
@@ -3608,7 +3741,7 @@
             <a:r>
               <a:rPr sz="1400" b="0" i="0">
                 <a:solidFill>
-                  <a:srgbClr val="24115F"/>
+                  <a:srgbClr val="8E8780"/>
                 </a:solidFill>
               </a:rPr>
               <a:t>아기 사진을 넣어 주세요</a:t>
@@ -3618,14 +3751,14 @@
       </p:sp>
       <p:graphicFrame>
         <p:nvGraphicFramePr>
-          <p:cNvPr id="6" name="표"/>
+          <p:cNvPr id="7" name="표"/>
           <p:cNvGraphicFramePr>
             <a:graphicFrameLocks noGrp="1"/>
           </p:cNvGraphicFramePr>
           <p:nvPr/>
         </p:nvGraphicFramePr>
         <p:xfrm>
-          <a:off x="4846320" y="1554480"/>
+          <a:off x="4846320" y="1783080"/>
           <a:ext cx="6705295" cy="3950208"/>
         </p:xfrm>
         <a:graphic>
@@ -3648,7 +3781,7 @@
                       <a:r>
                         <a:rPr sz="1500" b="1">
                           <a:solidFill>
-                            <a:srgbClr val="24115F"/>
+                            <a:srgbClr val="302749"/>
                           </a:solidFill>
                         </a:rPr>
                         <a:t>이름</a:t>
@@ -3694,7 +3827,7 @@
                       <a:r>
                         <a:rPr sz="1500" b="0">
                           <a:solidFill>
-                            <a:srgbClr val="2B2B2B"/>
+                            <a:srgbClr val="26231F"/>
                           </a:solidFill>
                         </a:rPr>
                         <a:t>입력하세요</a:t>
@@ -3727,7 +3860,7 @@
                       <a:prstDash val="solid"/>
                     </a:lnB>
                     <a:solidFill>
-                      <a:srgbClr val="F1EEFC"/>
+                      <a:srgbClr val="EFEAFD"/>
                     </a:solidFill>
                   </a:tcPr>
                 </a:tc>
@@ -3742,7 +3875,7 @@
                       <a:r>
                         <a:rPr sz="1500" b="1">
                           <a:solidFill>
-                            <a:srgbClr val="24115F"/>
+                            <a:srgbClr val="302749"/>
                           </a:solidFill>
                         </a:rPr>
                         <a:t>생일</a:t>
@@ -3788,7 +3921,7 @@
                       <a:r>
                         <a:rPr sz="1500" b="0">
                           <a:solidFill>
-                            <a:srgbClr val="2B2B2B"/>
+                            <a:srgbClr val="26231F"/>
                           </a:solidFill>
                         </a:rPr>
                         <a:t>입력하세요</a:t>
@@ -3836,7 +3969,7 @@
                       <a:r>
                         <a:rPr sz="1500" b="1">
                           <a:solidFill>
-                            <a:srgbClr val="24115F"/>
+                            <a:srgbClr val="302749"/>
                           </a:solidFill>
                         </a:rPr>
                         <a:t>키 · 몸무게</a:t>
@@ -3882,7 +4015,7 @@
                       <a:r>
                         <a:rPr sz="1500" b="0">
                           <a:solidFill>
-                            <a:srgbClr val="2B2B2B"/>
+                            <a:srgbClr val="26231F"/>
                           </a:solidFill>
                         </a:rPr>
                         <a:t>입력하세요</a:t>
@@ -3915,7 +4048,7 @@
                       <a:prstDash val="solid"/>
                     </a:lnB>
                     <a:solidFill>
-                      <a:srgbClr val="F1EEFC"/>
+                      <a:srgbClr val="EFEAFD"/>
                     </a:solidFill>
                   </a:tcPr>
                 </a:tc>
@@ -3930,7 +4063,7 @@
                       <a:r>
                         <a:rPr sz="1500" b="1">
                           <a:solidFill>
-                            <a:srgbClr val="24115F"/>
+                            <a:srgbClr val="302749"/>
                           </a:solidFill>
                         </a:rPr>
                         <a:t>좋아하는 것</a:t>
@@ -3976,7 +4109,7 @@
                       <a:r>
                         <a:rPr sz="1500" b="0">
                           <a:solidFill>
-                            <a:srgbClr val="2B2B2B"/>
+                            <a:srgbClr val="26231F"/>
                           </a:solidFill>
                         </a:rPr>
                         <a:t>입력하세요</a:t>
@@ -4024,7 +4157,7 @@
                       <a:r>
                         <a:rPr sz="1500" b="1">
                           <a:solidFill>
-                            <a:srgbClr val="24115F"/>
+                            <a:srgbClr val="302749"/>
                           </a:solidFill>
                         </a:rPr>
                         <a:t>별명</a:t>
@@ -4070,7 +4203,7 @@
                       <a:r>
                         <a:rPr sz="1500" b="0">
                           <a:solidFill>
-                            <a:srgbClr val="2B2B2B"/>
+                            <a:srgbClr val="26231F"/>
                           </a:solidFill>
                         </a:rPr>
                         <a:t>입력하세요</a:t>
@@ -4103,7 +4236,7 @@
                       <a:prstDash val="solid"/>
                     </a:lnB>
                     <a:solidFill>
-                      <a:srgbClr val="F1EEFC"/>
+                      <a:srgbClr val="EFEAFD"/>
                     </a:solidFill>
                   </a:tcPr>
                 </a:tc>
@@ -4118,7 +4251,7 @@
                       <a:r>
                         <a:rPr sz="1500" b="1">
                           <a:solidFill>
-                            <a:srgbClr val="24115F"/>
+                            <a:srgbClr val="302749"/>
                           </a:solidFill>
                         </a:rPr>
                         <a:t>부모의 마음</a:t>
@@ -4164,7 +4297,7 @@
                       <a:r>
                         <a:rPr sz="1500" b="0">
                           <a:solidFill>
-                            <a:srgbClr val="2B2B2B"/>
+                            <a:srgbClr val="26231F"/>
                           </a:solidFill>
                         </a:rPr>
                         <a:t>입력하세요</a:t>
@@ -4240,14 +4373,14 @@
         </p:nvSpPr>
         <p:spPr>
           <a:xfrm>
-            <a:off x="-182880" y="6144768"/>
-            <a:ext cx="12557455" cy="731520"/>
-          </a:xfrm>
-          <a:prstGeom prst="wave">
+            <a:off x="640080" y="566928"/>
+            <a:ext cx="10911535" cy="10972"/>
+          </a:xfrm>
+          <a:prstGeom prst="rect">
             <a:avLst/>
           </a:prstGeom>
           <a:solidFill>
-            <a:srgbClr val="DBD1FA"/>
+            <a:srgbClr val="26231F"/>
           </a:solidFill>
           <a:ln>
             <a:noFill/>
@@ -4263,20 +4396,58 @@
       </p:sp>
       <p:sp>
         <p:nvSpPr>
-          <p:cNvPr id="4" name="장식"/>
+          <p:cNvPr id="4" name="상단 라벨"/>
+          <p:cNvSpPr txBox="1"/>
+          <p:nvPr/>
+        </p:nvSpPr>
+        <p:spPr>
+          <a:xfrm>
+            <a:off x="640080" y="237744"/>
+            <a:ext cx="5486400" cy="274320"/>
+          </a:xfrm>
+          <a:prstGeom prst="rect">
+            <a:avLst/>
+          </a:prstGeom>
+          <a:noFill/>
+        </p:spPr>
+        <p:txBody>
+          <a:bodyPr wrap="square" lIns="54864" rIns="54864" tIns="27432" bIns="27432" anchor="ctr">
+            <a:noAutofit/>
+          </a:bodyPr>
+          <a:lstStyle/>
+          <a:p>
+            <a:pPr algn="l">
+              <a:lnSpc>
+                <a:spcPct val="115000"/>
+              </a:lnSpc>
+            </a:pPr>
+            <a:r>
+              <a:rPr sz="900" b="1" i="0" spc="250">
+                <a:solidFill>
+                  <a:srgbClr val="26231F"/>
+                </a:solidFill>
+              </a:rPr>
+              <a:t>FIRST BIRTHDAY</a:t>
+            </a:r>
+          </a:p>
+        </p:txBody>
+      </p:sp>
+      <p:sp>
+        <p:nvSpPr>
+          <p:cNvPr id="5" name="포인트"/>
           <p:cNvSpPr/>
           <p:nvPr/>
         </p:nvSpPr>
         <p:spPr>
-          <a:xfrm>
-            <a:off x="-182880" y="6400800"/>
-            <a:ext cx="12557455" cy="502920"/>
-          </a:xfrm>
-          <a:prstGeom prst="wave">
+          <a:xfrm rot="18900000">
+            <a:off x="11204143" y="246888"/>
+            <a:ext cx="237744" cy="237744"/>
+          </a:xfrm>
+          <a:prstGeom prst="teardrop">
             <a:avLst/>
           </a:prstGeom>
           <a:solidFill>
-            <a:srgbClr val="4D26C5"/>
+            <a:srgbClr val="977BEA"/>
           </a:solidFill>
           <a:ln>
             <a:noFill/>
@@ -4302,8 +4473,8 @@
         </p:nvSpPr>
         <p:spPr>
           <a:xfrm>
-            <a:off x="640080" y="457200"/>
-            <a:ext cx="9722815" cy="868680"/>
+            <a:off x="640080" y="731520"/>
+            <a:ext cx="10911535" cy="822960"/>
           </a:xfrm>
         </p:spPr>
         <p:txBody>
@@ -4320,7 +4491,7 @@
             <a:r>
               <a:rPr sz="3000" b="1" i="0">
                 <a:solidFill>
-                  <a:srgbClr val="24115F"/>
+                  <a:srgbClr val="26231F"/>
                 </a:solidFill>
               </a:rPr>
               <a:t>태어난 날 이야기</a:t>
@@ -4330,13 +4501,13 @@
       </p:sp>
       <p:sp>
         <p:nvSpPr>
-          <p:cNvPr id="5" name="타임라인 선"/>
+          <p:cNvPr id="6" name="타임라인 선"/>
           <p:cNvSpPr/>
           <p:nvPr/>
         </p:nvSpPr>
         <p:spPr>
           <a:xfrm>
-            <a:off x="640080" y="3291840"/>
+            <a:off x="640080" y="3520440"/>
             <a:ext cx="10911535" cy="54864"/>
           </a:xfrm>
           <a:prstGeom prst="rect">
@@ -4359,20 +4530,20 @@
       </p:sp>
       <p:sp>
         <p:nvSpPr>
-          <p:cNvPr id="6" name="때 1"/>
+          <p:cNvPr id="7" name="때 1"/>
           <p:cNvSpPr/>
           <p:nvPr/>
         </p:nvSpPr>
         <p:spPr>
           <a:xfrm>
-            <a:off x="1802853" y="3108960"/>
+            <a:off x="1802853" y="3337560"/>
             <a:ext cx="402336" cy="402336"/>
           </a:xfrm>
           <a:prstGeom prst="ellipse">
             <a:avLst/>
           </a:prstGeom>
           <a:solidFill>
-            <a:srgbClr val="4D26C5"/>
+            <a:srgbClr val="977BEA"/>
           </a:solidFill>
           <a:ln w="38100">
             <a:solidFill>
@@ -4390,13 +4561,13 @@
       </p:sp>
       <p:sp>
         <p:nvSpPr>
-          <p:cNvPr id="7" name="TextBox 6"/>
+          <p:cNvPr id="8" name="TextBox 7"/>
           <p:cNvSpPr txBox="1"/>
           <p:nvPr/>
         </p:nvSpPr>
         <p:spPr>
           <a:xfrm>
-            <a:off x="685800" y="2468880"/>
+            <a:off x="685800" y="2697480"/>
             <a:ext cx="2636443" cy="457200"/>
           </a:xfrm>
           <a:prstGeom prst="rect">
@@ -4418,7 +4589,7 @@
             <a:r>
               <a:rPr sz="1600" b="1" i="0">
                 <a:solidFill>
-                  <a:srgbClr val="4D26C5"/>
+                  <a:srgbClr val="977BEA"/>
                 </a:solidFill>
               </a:rPr>
               <a:t>임신</a:t>
@@ -4428,13 +4599,13 @@
       </p:sp>
       <p:sp>
         <p:nvSpPr>
-          <p:cNvPr id="8" name="TextBox 7"/>
+          <p:cNvPr id="9" name="TextBox 8"/>
           <p:cNvSpPr txBox="1"/>
           <p:nvPr/>
         </p:nvSpPr>
         <p:spPr>
           <a:xfrm>
-            <a:off x="731519" y="3657600"/>
+            <a:off x="731519" y="3886200"/>
             <a:ext cx="2545003" cy="457200"/>
           </a:xfrm>
           <a:prstGeom prst="rect">
@@ -4456,7 +4627,7 @@
             <a:r>
               <a:rPr sz="1800" b="1" i="0">
                 <a:solidFill>
-                  <a:srgbClr val="24115F"/>
+                  <a:srgbClr val="302749"/>
                 </a:solidFill>
               </a:rPr>
               <a:t>소식을 들은 날</a:t>
@@ -4466,13 +4637,13 @@
       </p:sp>
       <p:sp>
         <p:nvSpPr>
-          <p:cNvPr id="9" name="TextBox 8"/>
+          <p:cNvPr id="10" name="TextBox 9"/>
           <p:cNvSpPr txBox="1"/>
           <p:nvPr/>
         </p:nvSpPr>
         <p:spPr>
           <a:xfrm>
-            <a:off x="731519" y="4160520"/>
+            <a:off x="731519" y="4389120"/>
             <a:ext cx="2545003" cy="1645920"/>
           </a:xfrm>
           <a:prstGeom prst="rect">
@@ -4494,7 +4665,7 @@
             <a:r>
               <a:rPr sz="1500" b="0" i="0">
                 <a:solidFill>
-                  <a:srgbClr val="2B2B2B"/>
+                  <a:srgbClr val="26231F"/>
                 </a:solidFill>
               </a:rPr>
               <a:t>기억을 적어 주세요</a:t>
@@ -4504,20 +4675,20 @@
       </p:sp>
       <p:sp>
         <p:nvSpPr>
-          <p:cNvPr id="10" name="때 2"/>
+          <p:cNvPr id="11" name="때 2"/>
           <p:cNvSpPr/>
           <p:nvPr/>
         </p:nvSpPr>
         <p:spPr>
           <a:xfrm>
-            <a:off x="4530737" y="3108960"/>
+            <a:off x="4530737" y="3337560"/>
             <a:ext cx="402336" cy="402336"/>
           </a:xfrm>
           <a:prstGeom prst="ellipse">
             <a:avLst/>
           </a:prstGeom>
           <a:solidFill>
-            <a:srgbClr val="4D26C5"/>
+            <a:srgbClr val="977BEA"/>
           </a:solidFill>
           <a:ln w="38100">
             <a:solidFill>
@@ -4535,13 +4706,13 @@
       </p:sp>
       <p:sp>
         <p:nvSpPr>
-          <p:cNvPr id="11" name="TextBox 10"/>
+          <p:cNvPr id="12" name="TextBox 11"/>
           <p:cNvSpPr txBox="1"/>
           <p:nvPr/>
         </p:nvSpPr>
         <p:spPr>
           <a:xfrm>
-            <a:off x="3413683" y="2468880"/>
+            <a:off x="3413683" y="2697480"/>
             <a:ext cx="2636443" cy="457200"/>
           </a:xfrm>
           <a:prstGeom prst="rect">
@@ -4563,7 +4734,7 @@
             <a:r>
               <a:rPr sz="1600" b="1" i="0">
                 <a:solidFill>
-                  <a:srgbClr val="4D26C5"/>
+                  <a:srgbClr val="977BEA"/>
                 </a:solidFill>
               </a:rPr>
               <a:t>출산</a:t>
@@ -4573,13 +4744,13 @@
       </p:sp>
       <p:sp>
         <p:nvSpPr>
-          <p:cNvPr id="12" name="TextBox 11"/>
+          <p:cNvPr id="13" name="TextBox 12"/>
           <p:cNvSpPr txBox="1"/>
           <p:nvPr/>
         </p:nvSpPr>
         <p:spPr>
           <a:xfrm>
-            <a:off x="3459403" y="3657600"/>
+            <a:off x="3459403" y="3886200"/>
             <a:ext cx="2545003" cy="457200"/>
           </a:xfrm>
           <a:prstGeom prst="rect">
@@ -4601,7 +4772,7 @@
             <a:r>
               <a:rPr sz="1800" b="1" i="0">
                 <a:solidFill>
-                  <a:srgbClr val="24115F"/>
+                  <a:srgbClr val="302749"/>
                 </a:solidFill>
               </a:rPr>
               <a:t>태어난 날</a:t>
@@ -4611,13 +4782,13 @@
       </p:sp>
       <p:sp>
         <p:nvSpPr>
-          <p:cNvPr id="13" name="TextBox 12"/>
+          <p:cNvPr id="14" name="TextBox 13"/>
           <p:cNvSpPr txBox="1"/>
           <p:nvPr/>
         </p:nvSpPr>
         <p:spPr>
           <a:xfrm>
-            <a:off x="3459403" y="4160520"/>
+            <a:off x="3459403" y="4389120"/>
             <a:ext cx="2545003" cy="1645920"/>
           </a:xfrm>
           <a:prstGeom prst="rect">
@@ -4639,7 +4810,7 @@
             <a:r>
               <a:rPr sz="1500" b="0" i="0">
                 <a:solidFill>
-                  <a:srgbClr val="2B2B2B"/>
+                  <a:srgbClr val="26231F"/>
                 </a:solidFill>
               </a:rPr>
               <a:t>기억을 적어 주세요</a:t>
@@ -4649,20 +4820,20 @@
       </p:sp>
       <p:sp>
         <p:nvSpPr>
-          <p:cNvPr id="14" name="때 3"/>
+          <p:cNvPr id="15" name="때 3"/>
           <p:cNvSpPr/>
           <p:nvPr/>
         </p:nvSpPr>
         <p:spPr>
           <a:xfrm>
-            <a:off x="7258621" y="3108960"/>
+            <a:off x="7258621" y="3337560"/>
             <a:ext cx="402336" cy="402336"/>
           </a:xfrm>
           <a:prstGeom prst="ellipse">
             <a:avLst/>
           </a:prstGeom>
           <a:solidFill>
-            <a:srgbClr val="4D26C5"/>
+            <a:srgbClr val="977BEA"/>
           </a:solidFill>
           <a:ln w="38100">
             <a:solidFill>
@@ -4680,13 +4851,13 @@
       </p:sp>
       <p:sp>
         <p:nvSpPr>
-          <p:cNvPr id="15" name="TextBox 14"/>
+          <p:cNvPr id="16" name="TextBox 15"/>
           <p:cNvSpPr txBox="1"/>
           <p:nvPr/>
         </p:nvSpPr>
         <p:spPr>
           <a:xfrm>
-            <a:off x="6141567" y="2468880"/>
+            <a:off x="6141567" y="2697480"/>
             <a:ext cx="2636443" cy="457200"/>
           </a:xfrm>
           <a:prstGeom prst="rect">
@@ -4708,7 +4879,7 @@
             <a:r>
               <a:rPr sz="1600" b="1" i="0">
                 <a:solidFill>
-                  <a:srgbClr val="4D26C5"/>
+                  <a:srgbClr val="977BEA"/>
                 </a:solidFill>
               </a:rPr>
               <a:t>첫 만남</a:t>
@@ -4718,13 +4889,13 @@
       </p:sp>
       <p:sp>
         <p:nvSpPr>
-          <p:cNvPr id="16" name="TextBox 15"/>
+          <p:cNvPr id="17" name="TextBox 16"/>
           <p:cNvSpPr txBox="1"/>
           <p:nvPr/>
         </p:nvSpPr>
         <p:spPr>
           <a:xfrm>
-            <a:off x="6187287" y="3657600"/>
+            <a:off x="6187287" y="3886200"/>
             <a:ext cx="2545003" cy="457200"/>
           </a:xfrm>
           <a:prstGeom prst="rect">
@@ -4746,7 +4917,7 @@
             <a:r>
               <a:rPr sz="1800" b="1" i="0">
                 <a:solidFill>
-                  <a:srgbClr val="24115F"/>
+                  <a:srgbClr val="302749"/>
                 </a:solidFill>
               </a:rPr>
               <a:t>품에 안은 순간</a:t>
@@ -4756,13 +4927,13 @@
       </p:sp>
       <p:sp>
         <p:nvSpPr>
-          <p:cNvPr id="17" name="TextBox 16"/>
+          <p:cNvPr id="18" name="TextBox 17"/>
           <p:cNvSpPr txBox="1"/>
           <p:nvPr/>
         </p:nvSpPr>
         <p:spPr>
           <a:xfrm>
-            <a:off x="6187287" y="4160520"/>
+            <a:off x="6187287" y="4389120"/>
             <a:ext cx="2545003" cy="1645920"/>
           </a:xfrm>
           <a:prstGeom prst="rect">
@@ -4784,7 +4955,7 @@
             <a:r>
               <a:rPr sz="1500" b="0" i="0">
                 <a:solidFill>
-                  <a:srgbClr val="2B2B2B"/>
+                  <a:srgbClr val="26231F"/>
                 </a:solidFill>
               </a:rPr>
               <a:t>기억을 적어 주세요</a:t>
@@ -4794,20 +4965,20 @@
       </p:sp>
       <p:sp>
         <p:nvSpPr>
-          <p:cNvPr id="18" name="때 4"/>
+          <p:cNvPr id="19" name="때 4"/>
           <p:cNvSpPr/>
           <p:nvPr/>
         </p:nvSpPr>
         <p:spPr>
           <a:xfrm>
-            <a:off x="9986505" y="3108960"/>
+            <a:off x="9986505" y="3337560"/>
             <a:ext cx="402336" cy="402336"/>
           </a:xfrm>
           <a:prstGeom prst="ellipse">
             <a:avLst/>
           </a:prstGeom>
           <a:solidFill>
-            <a:srgbClr val="4D26C5"/>
+            <a:srgbClr val="977BEA"/>
           </a:solidFill>
           <a:ln w="38100">
             <a:solidFill>
@@ -4825,13 +4996,13 @@
       </p:sp>
       <p:sp>
         <p:nvSpPr>
-          <p:cNvPr id="19" name="TextBox 18"/>
+          <p:cNvPr id="20" name="TextBox 19"/>
           <p:cNvSpPr txBox="1"/>
           <p:nvPr/>
         </p:nvSpPr>
         <p:spPr>
           <a:xfrm>
-            <a:off x="8869451" y="2468880"/>
+            <a:off x="8869451" y="2697480"/>
             <a:ext cx="2636443" cy="457200"/>
           </a:xfrm>
           <a:prstGeom prst="rect">
@@ -4853,7 +5024,7 @@
             <a:r>
               <a:rPr sz="1600" b="1" i="0">
                 <a:solidFill>
-                  <a:srgbClr val="4D26C5"/>
+                  <a:srgbClr val="977BEA"/>
                 </a:solidFill>
               </a:rPr>
               <a:t>집으로</a:t>
@@ -4863,13 +5034,13 @@
       </p:sp>
       <p:sp>
         <p:nvSpPr>
-          <p:cNvPr id="20" name="TextBox 19"/>
+          <p:cNvPr id="21" name="TextBox 20"/>
           <p:cNvSpPr txBox="1"/>
           <p:nvPr/>
         </p:nvSpPr>
         <p:spPr>
           <a:xfrm>
-            <a:off x="8915171" y="3657600"/>
+            <a:off x="8915171" y="3886200"/>
             <a:ext cx="2545003" cy="457200"/>
           </a:xfrm>
           <a:prstGeom prst="rect">
@@ -4891,7 +5062,7 @@
             <a:r>
               <a:rPr sz="1800" b="1" i="0">
                 <a:solidFill>
-                  <a:srgbClr val="24115F"/>
+                  <a:srgbClr val="302749"/>
                 </a:solidFill>
               </a:rPr>
               <a:t>함께 돌아온 날</a:t>
@@ -4901,13 +5072,13 @@
       </p:sp>
       <p:sp>
         <p:nvSpPr>
-          <p:cNvPr id="21" name="TextBox 20"/>
+          <p:cNvPr id="22" name="TextBox 21"/>
           <p:cNvSpPr txBox="1"/>
           <p:nvPr/>
         </p:nvSpPr>
         <p:spPr>
           <a:xfrm>
-            <a:off x="8915171" y="4160520"/>
+            <a:off x="8915171" y="4389120"/>
             <a:ext cx="2545003" cy="1645920"/>
           </a:xfrm>
           <a:prstGeom prst="rect">
@@ -4929,7 +5100,7 @@
             <a:r>
               <a:rPr sz="1500" b="0" i="0">
                 <a:solidFill>
-                  <a:srgbClr val="2B2B2B"/>
+                  <a:srgbClr val="26231F"/>
                 </a:solidFill>
               </a:rPr>
               <a:t>기억을 적어 주세요</a:t>
@@ -4971,14 +5142,14 @@
         </p:nvSpPr>
         <p:spPr>
           <a:xfrm>
-            <a:off x="-182880" y="6144768"/>
-            <a:ext cx="12557455" cy="731520"/>
-          </a:xfrm>
-          <a:prstGeom prst="wave">
+            <a:off x="640080" y="566928"/>
+            <a:ext cx="10911535" cy="10972"/>
+          </a:xfrm>
+          <a:prstGeom prst="rect">
             <a:avLst/>
           </a:prstGeom>
           <a:solidFill>
-            <a:srgbClr val="DBD1FA"/>
+            <a:srgbClr val="26231F"/>
           </a:solidFill>
           <a:ln>
             <a:noFill/>
@@ -4994,20 +5165,58 @@
       </p:sp>
       <p:sp>
         <p:nvSpPr>
-          <p:cNvPr id="4" name="장식"/>
+          <p:cNvPr id="4" name="상단 라벨"/>
+          <p:cNvSpPr txBox="1"/>
+          <p:nvPr/>
+        </p:nvSpPr>
+        <p:spPr>
+          <a:xfrm>
+            <a:off x="640080" y="237744"/>
+            <a:ext cx="5486400" cy="274320"/>
+          </a:xfrm>
+          <a:prstGeom prst="rect">
+            <a:avLst/>
+          </a:prstGeom>
+          <a:noFill/>
+        </p:spPr>
+        <p:txBody>
+          <a:bodyPr wrap="square" lIns="54864" rIns="54864" tIns="27432" bIns="27432" anchor="ctr">
+            <a:noAutofit/>
+          </a:bodyPr>
+          <a:lstStyle/>
+          <a:p>
+            <a:pPr algn="l">
+              <a:lnSpc>
+                <a:spcPct val="115000"/>
+              </a:lnSpc>
+            </a:pPr>
+            <a:r>
+              <a:rPr sz="900" b="1" i="0" spc="250">
+                <a:solidFill>
+                  <a:srgbClr val="26231F"/>
+                </a:solidFill>
+              </a:rPr>
+              <a:t>FIRST BIRTHDAY</a:t>
+            </a:r>
+          </a:p>
+        </p:txBody>
+      </p:sp>
+      <p:sp>
+        <p:nvSpPr>
+          <p:cNvPr id="5" name="포인트"/>
           <p:cNvSpPr/>
           <p:nvPr/>
         </p:nvSpPr>
         <p:spPr>
-          <a:xfrm>
-            <a:off x="-182880" y="6400800"/>
-            <a:ext cx="12557455" cy="502920"/>
-          </a:xfrm>
-          <a:prstGeom prst="wave">
+          <a:xfrm rot="18900000">
+            <a:off x="11204143" y="246888"/>
+            <a:ext cx="237744" cy="237744"/>
+          </a:xfrm>
+          <a:prstGeom prst="teardrop">
             <a:avLst/>
           </a:prstGeom>
           <a:solidFill>
-            <a:srgbClr val="4D26C5"/>
+            <a:srgbClr val="977BEA"/>
           </a:solidFill>
           <a:ln>
             <a:noFill/>
@@ -5033,8 +5242,8 @@
         </p:nvSpPr>
         <p:spPr>
           <a:xfrm>
-            <a:off x="640080" y="457200"/>
-            <a:ext cx="9722815" cy="868680"/>
+            <a:off x="640080" y="731520"/>
+            <a:ext cx="10911535" cy="822960"/>
           </a:xfrm>
         </p:spPr>
         <p:txBody>
@@ -5051,7 +5260,7 @@
             <a:r>
               <a:rPr sz="3000" b="1" i="0">
                 <a:solidFill>
-                  <a:srgbClr val="24115F"/>
+                  <a:srgbClr val="26231F"/>
                 </a:solidFill>
               </a:rPr>
               <a:t>첫 번째 순간들</a:t>
@@ -5061,27 +5270,25 @@
       </p:sp>
       <p:sp>
         <p:nvSpPr>
-          <p:cNvPr id="5" name="카드 1"/>
+          <p:cNvPr id="6" name="카드 1"/>
           <p:cNvSpPr/>
           <p:nvPr/>
         </p:nvSpPr>
         <p:spPr>
           <a:xfrm>
-            <a:off x="640080" y="1554480"/>
-            <a:ext cx="2556433" cy="4389120"/>
+            <a:off x="640080" y="1783080"/>
+            <a:ext cx="2556433" cy="4572000"/>
           </a:xfrm>
           <a:prstGeom prst="roundRect">
             <a:avLst>
-              <a:gd name="adj" fmla="val 8000"/>
+              <a:gd name="adj" fmla="val 7000"/>
             </a:avLst>
           </a:prstGeom>
           <a:solidFill>
-            <a:srgbClr val="F1EEFC"/>
+            <a:srgbClr val="EFEAFD"/>
           </a:solidFill>
-          <a:ln w="15875">
-            <a:solidFill>
-              <a:srgbClr val="DBD1FA"/>
-            </a:solidFill>
+          <a:ln>
+            <a:noFill/>
           </a:ln>
         </p:spPr>
         <p:txBody>
@@ -5094,20 +5301,20 @@
       </p:sp>
       <p:sp>
         <p:nvSpPr>
-          <p:cNvPr id="6" name="번호 1"/>
+          <p:cNvPr id="7" name="번호 1"/>
           <p:cNvSpPr/>
           <p:nvPr/>
         </p:nvSpPr>
         <p:spPr>
           <a:xfrm>
-            <a:off x="822959" y="1737360"/>
+            <a:off x="822959" y="1965960"/>
             <a:ext cx="457200" cy="457200"/>
           </a:xfrm>
           <a:prstGeom prst="ellipse">
             <a:avLst/>
           </a:prstGeom>
           <a:solidFill>
-            <a:srgbClr val="4D26C5"/>
+            <a:srgbClr val="977BEA"/>
           </a:solidFill>
           <a:ln>
             <a:noFill/>
@@ -5127,7 +5334,7 @@
             <a:r>
               <a:rPr sz="1600" b="1" i="0">
                 <a:solidFill>
-                  <a:srgbClr val="FFFFFF"/>
+                  <a:srgbClr val="26231F"/>
                 </a:solidFill>
               </a:rPr>
               <a:t>1</a:t>
@@ -5137,13 +5344,13 @@
       </p:sp>
       <p:sp>
         <p:nvSpPr>
-          <p:cNvPr id="7" name="TextBox 6"/>
+          <p:cNvPr id="8" name="TextBox 7"/>
           <p:cNvSpPr txBox="1"/>
           <p:nvPr/>
         </p:nvSpPr>
         <p:spPr>
           <a:xfrm>
-            <a:off x="777240" y="2331720"/>
+            <a:off x="777240" y="2560320"/>
             <a:ext cx="2282113" cy="640080"/>
           </a:xfrm>
           <a:prstGeom prst="rect">
@@ -5165,7 +5372,7 @@
             <a:r>
               <a:rPr sz="1800" b="1" i="0">
                 <a:solidFill>
-                  <a:srgbClr val="24115F"/>
+                  <a:srgbClr val="302749"/>
                 </a:solidFill>
               </a:rPr>
               <a:t>첫 웃음</a:t>
@@ -5175,14 +5382,14 @@
       </p:sp>
       <p:sp>
         <p:nvSpPr>
-          <p:cNvPr id="8" name="TextBox 7"/>
+          <p:cNvPr id="9" name="TextBox 8"/>
           <p:cNvSpPr txBox="1"/>
           <p:nvPr/>
         </p:nvSpPr>
         <p:spPr>
           <a:xfrm>
-            <a:off x="777240" y="3017520"/>
-            <a:ext cx="2282113" cy="2788920"/>
+            <a:off x="777240" y="3246120"/>
+            <a:ext cx="2282113" cy="2971800"/>
           </a:xfrm>
           <a:prstGeom prst="rect">
             <a:avLst/>
@@ -5203,7 +5410,7 @@
             <a:r>
               <a:rPr sz="1500" b="0" i="0">
                 <a:solidFill>
-                  <a:srgbClr val="2B2B2B"/>
+                  <a:srgbClr val="26231F"/>
                 </a:solidFill>
               </a:rPr>
               <a:t>언제였나요?</a:t>
@@ -5213,27 +5420,25 @@
       </p:sp>
       <p:sp>
         <p:nvSpPr>
-          <p:cNvPr id="9" name="카드 2"/>
+          <p:cNvPr id="10" name="카드 2"/>
           <p:cNvSpPr/>
           <p:nvPr/>
         </p:nvSpPr>
         <p:spPr>
           <a:xfrm>
-            <a:off x="3425113" y="1554480"/>
-            <a:ext cx="2556433" cy="4389120"/>
+            <a:off x="3425113" y="1783080"/>
+            <a:ext cx="2556433" cy="4572000"/>
           </a:xfrm>
           <a:prstGeom prst="roundRect">
             <a:avLst>
-              <a:gd name="adj" fmla="val 8000"/>
+              <a:gd name="adj" fmla="val 7000"/>
             </a:avLst>
           </a:prstGeom>
           <a:solidFill>
-            <a:srgbClr val="F1EEFC"/>
+            <a:srgbClr val="EFEAFD"/>
           </a:solidFill>
-          <a:ln w="15875">
-            <a:solidFill>
-              <a:srgbClr val="DBD1FA"/>
-            </a:solidFill>
+          <a:ln>
+            <a:noFill/>
           </a:ln>
         </p:spPr>
         <p:txBody>
@@ -5246,20 +5451,20 @@
       </p:sp>
       <p:sp>
         <p:nvSpPr>
-          <p:cNvPr id="10" name="번호 2"/>
+          <p:cNvPr id="11" name="번호 2"/>
           <p:cNvSpPr/>
           <p:nvPr/>
         </p:nvSpPr>
         <p:spPr>
           <a:xfrm>
-            <a:off x="3607993" y="1737360"/>
+            <a:off x="3607993" y="1965960"/>
             <a:ext cx="457200" cy="457200"/>
           </a:xfrm>
           <a:prstGeom prst="ellipse">
             <a:avLst/>
           </a:prstGeom>
           <a:solidFill>
-            <a:srgbClr val="4D26C5"/>
+            <a:srgbClr val="977BEA"/>
           </a:solidFill>
           <a:ln>
             <a:noFill/>
@@ -5279,7 +5484,7 @@
             <a:r>
               <a:rPr sz="1600" b="1" i="0">
                 <a:solidFill>
-                  <a:srgbClr val="FFFFFF"/>
+                  <a:srgbClr val="26231F"/>
                 </a:solidFill>
               </a:rPr>
               <a:t>2</a:t>
@@ -5289,13 +5494,13 @@
       </p:sp>
       <p:sp>
         <p:nvSpPr>
-          <p:cNvPr id="11" name="TextBox 10"/>
+          <p:cNvPr id="12" name="TextBox 11"/>
           <p:cNvSpPr txBox="1"/>
           <p:nvPr/>
         </p:nvSpPr>
         <p:spPr>
           <a:xfrm>
-            <a:off x="3562273" y="2331720"/>
+            <a:off x="3562273" y="2560320"/>
             <a:ext cx="2282113" cy="640080"/>
           </a:xfrm>
           <a:prstGeom prst="rect">
@@ -5317,7 +5522,7 @@
             <a:r>
               <a:rPr sz="1800" b="1" i="0">
                 <a:solidFill>
-                  <a:srgbClr val="24115F"/>
+                  <a:srgbClr val="302749"/>
                 </a:solidFill>
               </a:rPr>
               <a:t>첫 뒤집기</a:t>
@@ -5327,14 +5532,14 @@
       </p:sp>
       <p:sp>
         <p:nvSpPr>
-          <p:cNvPr id="12" name="TextBox 11"/>
+          <p:cNvPr id="13" name="TextBox 12"/>
           <p:cNvSpPr txBox="1"/>
           <p:nvPr/>
         </p:nvSpPr>
         <p:spPr>
           <a:xfrm>
-            <a:off x="3562273" y="3017520"/>
-            <a:ext cx="2282113" cy="2788920"/>
+            <a:off x="3562273" y="3246120"/>
+            <a:ext cx="2282113" cy="2971800"/>
           </a:xfrm>
           <a:prstGeom prst="rect">
             <a:avLst/>
@@ -5355,7 +5560,7 @@
             <a:r>
               <a:rPr sz="1500" b="0" i="0">
                 <a:solidFill>
-                  <a:srgbClr val="2B2B2B"/>
+                  <a:srgbClr val="26231F"/>
                 </a:solidFill>
               </a:rPr>
               <a:t>언제였나요?</a:t>
@@ -5365,27 +5570,25 @@
       </p:sp>
       <p:sp>
         <p:nvSpPr>
-          <p:cNvPr id="13" name="카드 3"/>
+          <p:cNvPr id="14" name="카드 3"/>
           <p:cNvSpPr/>
           <p:nvPr/>
         </p:nvSpPr>
         <p:spPr>
           <a:xfrm>
-            <a:off x="6210147" y="1554480"/>
-            <a:ext cx="2556433" cy="4389120"/>
+            <a:off x="6210147" y="1783080"/>
+            <a:ext cx="2556433" cy="4572000"/>
           </a:xfrm>
           <a:prstGeom prst="roundRect">
             <a:avLst>
-              <a:gd name="adj" fmla="val 8000"/>
+              <a:gd name="adj" fmla="val 7000"/>
             </a:avLst>
           </a:prstGeom>
           <a:solidFill>
-            <a:srgbClr val="F1EEFC"/>
+            <a:srgbClr val="EFEAFD"/>
           </a:solidFill>
-          <a:ln w="15875">
-            <a:solidFill>
-              <a:srgbClr val="DBD1FA"/>
-            </a:solidFill>
+          <a:ln>
+            <a:noFill/>
           </a:ln>
         </p:spPr>
         <p:txBody>
@@ -5398,20 +5601,20 @@
       </p:sp>
       <p:sp>
         <p:nvSpPr>
-          <p:cNvPr id="14" name="번호 3"/>
+          <p:cNvPr id="15" name="번호 3"/>
           <p:cNvSpPr/>
           <p:nvPr/>
         </p:nvSpPr>
         <p:spPr>
           <a:xfrm>
-            <a:off x="6393027" y="1737360"/>
+            <a:off x="6393027" y="1965960"/>
             <a:ext cx="457200" cy="457200"/>
           </a:xfrm>
           <a:prstGeom prst="ellipse">
             <a:avLst/>
           </a:prstGeom>
           <a:solidFill>
-            <a:srgbClr val="4D26C5"/>
+            <a:srgbClr val="977BEA"/>
           </a:solidFill>
           <a:ln>
             <a:noFill/>
@@ -5431,7 +5634,7 @@
             <a:r>
               <a:rPr sz="1600" b="1" i="0">
                 <a:solidFill>
-                  <a:srgbClr val="FFFFFF"/>
+                  <a:srgbClr val="26231F"/>
                 </a:solidFill>
               </a:rPr>
               <a:t>3</a:t>
@@ -5441,13 +5644,13 @@
       </p:sp>
       <p:sp>
         <p:nvSpPr>
-          <p:cNvPr id="15" name="TextBox 14"/>
+          <p:cNvPr id="16" name="TextBox 15"/>
           <p:cNvSpPr txBox="1"/>
           <p:nvPr/>
         </p:nvSpPr>
         <p:spPr>
           <a:xfrm>
-            <a:off x="6347307" y="2331720"/>
+            <a:off x="6347307" y="2560320"/>
             <a:ext cx="2282113" cy="640080"/>
           </a:xfrm>
           <a:prstGeom prst="rect">
@@ -5469,7 +5672,7 @@
             <a:r>
               <a:rPr sz="1800" b="1" i="0">
                 <a:solidFill>
-                  <a:srgbClr val="24115F"/>
+                  <a:srgbClr val="302749"/>
                 </a:solidFill>
               </a:rPr>
               <a:t>첫 이</a:t>
@@ -5479,14 +5682,14 @@
       </p:sp>
       <p:sp>
         <p:nvSpPr>
-          <p:cNvPr id="16" name="TextBox 15"/>
+          <p:cNvPr id="17" name="TextBox 16"/>
           <p:cNvSpPr txBox="1"/>
           <p:nvPr/>
         </p:nvSpPr>
         <p:spPr>
           <a:xfrm>
-            <a:off x="6347307" y="3017520"/>
-            <a:ext cx="2282113" cy="2788920"/>
+            <a:off x="6347307" y="3246120"/>
+            <a:ext cx="2282113" cy="2971800"/>
           </a:xfrm>
           <a:prstGeom prst="rect">
             <a:avLst/>
@@ -5507,7 +5710,7 @@
             <a:r>
               <a:rPr sz="1500" b="0" i="0">
                 <a:solidFill>
-                  <a:srgbClr val="2B2B2B"/>
+                  <a:srgbClr val="26231F"/>
                 </a:solidFill>
               </a:rPr>
               <a:t>언제였나요?</a:t>
@@ -5517,27 +5720,25 @@
       </p:sp>
       <p:sp>
         <p:nvSpPr>
-          <p:cNvPr id="17" name="카드 4"/>
+          <p:cNvPr id="18" name="카드 4"/>
           <p:cNvSpPr/>
           <p:nvPr/>
         </p:nvSpPr>
         <p:spPr>
           <a:xfrm>
-            <a:off x="8995181" y="1554480"/>
-            <a:ext cx="2556433" cy="4389120"/>
+            <a:off x="8995181" y="1783080"/>
+            <a:ext cx="2556433" cy="4572000"/>
           </a:xfrm>
           <a:prstGeom prst="roundRect">
             <a:avLst>
-              <a:gd name="adj" fmla="val 8000"/>
+              <a:gd name="adj" fmla="val 7000"/>
             </a:avLst>
           </a:prstGeom>
           <a:solidFill>
-            <a:srgbClr val="F1EEFC"/>
+            <a:srgbClr val="EFEAFD"/>
           </a:solidFill>
-          <a:ln w="15875">
-            <a:solidFill>
-              <a:srgbClr val="DBD1FA"/>
-            </a:solidFill>
+          <a:ln>
+            <a:noFill/>
           </a:ln>
         </p:spPr>
         <p:txBody>
@@ -5550,20 +5751,20 @@
       </p:sp>
       <p:sp>
         <p:nvSpPr>
-          <p:cNvPr id="18" name="번호 4"/>
+          <p:cNvPr id="19" name="번호 4"/>
           <p:cNvSpPr/>
           <p:nvPr/>
         </p:nvSpPr>
         <p:spPr>
           <a:xfrm>
-            <a:off x="9178061" y="1737360"/>
+            <a:off x="9178061" y="1965960"/>
             <a:ext cx="457200" cy="457200"/>
           </a:xfrm>
           <a:prstGeom prst="ellipse">
             <a:avLst/>
           </a:prstGeom>
           <a:solidFill>
-            <a:srgbClr val="4D26C5"/>
+            <a:srgbClr val="977BEA"/>
           </a:solidFill>
           <a:ln>
             <a:noFill/>
@@ -5583,7 +5784,7 @@
             <a:r>
               <a:rPr sz="1600" b="1" i="0">
                 <a:solidFill>
-                  <a:srgbClr val="FFFFFF"/>
+                  <a:srgbClr val="26231F"/>
                 </a:solidFill>
               </a:rPr>
               <a:t>4</a:t>
@@ -5593,13 +5794,13 @@
       </p:sp>
       <p:sp>
         <p:nvSpPr>
-          <p:cNvPr id="19" name="TextBox 18"/>
+          <p:cNvPr id="20" name="TextBox 19"/>
           <p:cNvSpPr txBox="1"/>
           <p:nvPr/>
         </p:nvSpPr>
         <p:spPr>
           <a:xfrm>
-            <a:off x="9132341" y="2331720"/>
+            <a:off x="9132341" y="2560320"/>
             <a:ext cx="2282113" cy="640080"/>
           </a:xfrm>
           <a:prstGeom prst="rect">
@@ -5621,7 +5822,7 @@
             <a:r>
               <a:rPr sz="1800" b="1" i="0">
                 <a:solidFill>
-                  <a:srgbClr val="24115F"/>
+                  <a:srgbClr val="302749"/>
                 </a:solidFill>
               </a:rPr>
               <a:t>첫 걸음</a:t>
@@ -5631,14 +5832,14 @@
       </p:sp>
       <p:sp>
         <p:nvSpPr>
-          <p:cNvPr id="20" name="TextBox 19"/>
+          <p:cNvPr id="21" name="TextBox 20"/>
           <p:cNvSpPr txBox="1"/>
           <p:nvPr/>
         </p:nvSpPr>
         <p:spPr>
           <a:xfrm>
-            <a:off x="9132341" y="3017520"/>
-            <a:ext cx="2282113" cy="2788920"/>
+            <a:off x="9132341" y="3246120"/>
+            <a:ext cx="2282113" cy="2971800"/>
           </a:xfrm>
           <a:prstGeom prst="rect">
             <a:avLst/>
@@ -5659,7 +5860,7 @@
             <a:r>
               <a:rPr sz="1500" b="0" i="0">
                 <a:solidFill>
-                  <a:srgbClr val="2B2B2B"/>
+                  <a:srgbClr val="26231F"/>
                 </a:solidFill>
               </a:rPr>
               <a:t>언제였나요?</a:t>
@@ -5701,14 +5902,14 @@
         </p:nvSpPr>
         <p:spPr>
           <a:xfrm>
-            <a:off x="-182880" y="6144768"/>
-            <a:ext cx="12557455" cy="731520"/>
-          </a:xfrm>
-          <a:prstGeom prst="wave">
+            <a:off x="640080" y="566928"/>
+            <a:ext cx="10911535" cy="10972"/>
+          </a:xfrm>
+          <a:prstGeom prst="rect">
             <a:avLst/>
           </a:prstGeom>
           <a:solidFill>
-            <a:srgbClr val="DBD1FA"/>
+            <a:srgbClr val="26231F"/>
           </a:solidFill>
           <a:ln>
             <a:noFill/>
@@ -5724,20 +5925,58 @@
       </p:sp>
       <p:sp>
         <p:nvSpPr>
-          <p:cNvPr id="4" name="장식"/>
+          <p:cNvPr id="4" name="상단 라벨"/>
+          <p:cNvSpPr txBox="1"/>
+          <p:nvPr/>
+        </p:nvSpPr>
+        <p:spPr>
+          <a:xfrm>
+            <a:off x="640080" y="237744"/>
+            <a:ext cx="5486400" cy="274320"/>
+          </a:xfrm>
+          <a:prstGeom prst="rect">
+            <a:avLst/>
+          </a:prstGeom>
+          <a:noFill/>
+        </p:spPr>
+        <p:txBody>
+          <a:bodyPr wrap="square" lIns="54864" rIns="54864" tIns="27432" bIns="27432" anchor="ctr">
+            <a:noAutofit/>
+          </a:bodyPr>
+          <a:lstStyle/>
+          <a:p>
+            <a:pPr algn="l">
+              <a:lnSpc>
+                <a:spcPct val="115000"/>
+              </a:lnSpc>
+            </a:pPr>
+            <a:r>
+              <a:rPr sz="900" b="1" i="0" spc="250">
+                <a:solidFill>
+                  <a:srgbClr val="26231F"/>
+                </a:solidFill>
+              </a:rPr>
+              <a:t>FIRST BIRTHDAY</a:t>
+            </a:r>
+          </a:p>
+        </p:txBody>
+      </p:sp>
+      <p:sp>
+        <p:nvSpPr>
+          <p:cNvPr id="5" name="포인트"/>
           <p:cNvSpPr/>
           <p:nvPr/>
         </p:nvSpPr>
         <p:spPr>
-          <a:xfrm>
-            <a:off x="-182880" y="6400800"/>
-            <a:ext cx="12557455" cy="502920"/>
-          </a:xfrm>
-          <a:prstGeom prst="wave">
+          <a:xfrm rot="18900000">
+            <a:off x="11204143" y="246888"/>
+            <a:ext cx="237744" cy="237744"/>
+          </a:xfrm>
+          <a:prstGeom prst="teardrop">
             <a:avLst/>
           </a:prstGeom>
           <a:solidFill>
-            <a:srgbClr val="4D26C5"/>
+            <a:srgbClr val="977BEA"/>
           </a:solidFill>
           <a:ln>
             <a:noFill/>
@@ -5763,8 +6002,8 @@
         </p:nvSpPr>
         <p:spPr>
           <a:xfrm>
-            <a:off x="640080" y="457200"/>
-            <a:ext cx="9722815" cy="868680"/>
+            <a:off x="640080" y="731520"/>
+            <a:ext cx="10911535" cy="822960"/>
           </a:xfrm>
         </p:spPr>
         <p:txBody>
@@ -5781,7 +6020,7 @@
             <a:r>
               <a:rPr sz="3000" b="1" i="0">
                 <a:solidFill>
-                  <a:srgbClr val="24115F"/>
+                  <a:srgbClr val="26231F"/>
                 </a:solidFill>
               </a:rPr>
               <a:t>사진 모음</a:t>
@@ -5791,14 +6030,14 @@
       </p:sp>
       <p:sp>
         <p:nvSpPr>
-          <p:cNvPr id="5" name="사진 자리"/>
+          <p:cNvPr id="6" name="사진 자리"/>
           <p:cNvSpPr/>
           <p:nvPr/>
         </p:nvSpPr>
         <p:spPr>
           <a:xfrm>
-            <a:off x="640080" y="1554480"/>
-            <a:ext cx="2590723" cy="2103120"/>
+            <a:off x="640080" y="1783080"/>
+            <a:ext cx="2590723" cy="2194560"/>
           </a:xfrm>
           <a:prstGeom prst="roundRect">
             <a:avLst>
@@ -5809,9 +6048,7 @@
             <a:srgbClr val="DBD1FA"/>
           </a:solidFill>
           <a:ln w="19050">
-            <a:solidFill>
-              <a:srgbClr val="4D26C5"/>
-            </a:solidFill>
+            <a:noFill/>
             <a:prstDash val="dash"/>
           </a:ln>
         </p:spPr>
@@ -5829,7 +6066,7 @@
             <a:r>
               <a:rPr sz="1200" b="0" i="0">
                 <a:solidFill>
-                  <a:srgbClr val="24115F"/>
+                  <a:srgbClr val="8E8780"/>
                 </a:solidFill>
               </a:rPr>
               <a:t>사진 1</a:t>
@@ -5839,14 +6076,14 @@
       </p:sp>
       <p:sp>
         <p:nvSpPr>
-          <p:cNvPr id="6" name="사진 자리"/>
+          <p:cNvPr id="7" name="사진 자리"/>
           <p:cNvSpPr/>
           <p:nvPr/>
         </p:nvSpPr>
         <p:spPr>
           <a:xfrm>
-            <a:off x="3413683" y="1554480"/>
-            <a:ext cx="2590723" cy="2103120"/>
+            <a:off x="3413683" y="1783080"/>
+            <a:ext cx="2590723" cy="2194560"/>
           </a:xfrm>
           <a:prstGeom prst="roundRect">
             <a:avLst>
@@ -5857,9 +6094,7 @@
             <a:srgbClr val="DBD1FA"/>
           </a:solidFill>
           <a:ln w="19050">
-            <a:solidFill>
-              <a:srgbClr val="4D26C5"/>
-            </a:solidFill>
+            <a:noFill/>
             <a:prstDash val="dash"/>
           </a:ln>
         </p:spPr>
@@ -5877,7 +6112,7 @@
             <a:r>
               <a:rPr sz="1200" b="0" i="0">
                 <a:solidFill>
-                  <a:srgbClr val="24115F"/>
+                  <a:srgbClr val="8E8780"/>
                 </a:solidFill>
               </a:rPr>
               <a:t>사진 2</a:t>
@@ -5887,14 +6122,14 @@
       </p:sp>
       <p:sp>
         <p:nvSpPr>
-          <p:cNvPr id="7" name="사진 자리"/>
+          <p:cNvPr id="8" name="사진 자리"/>
           <p:cNvSpPr/>
           <p:nvPr/>
         </p:nvSpPr>
         <p:spPr>
           <a:xfrm>
-            <a:off x="6187287" y="1554480"/>
-            <a:ext cx="2590723" cy="2103120"/>
+            <a:off x="6187287" y="1783080"/>
+            <a:ext cx="2590723" cy="2194560"/>
           </a:xfrm>
           <a:prstGeom prst="roundRect">
             <a:avLst>
@@ -5905,9 +6140,7 @@
             <a:srgbClr val="DBD1FA"/>
           </a:solidFill>
           <a:ln w="19050">
-            <a:solidFill>
-              <a:srgbClr val="4D26C5"/>
-            </a:solidFill>
+            <a:noFill/>
             <a:prstDash val="dash"/>
           </a:ln>
         </p:spPr>
@@ -5925,7 +6158,7 @@
             <a:r>
               <a:rPr sz="1200" b="0" i="0">
                 <a:solidFill>
-                  <a:srgbClr val="24115F"/>
+                  <a:srgbClr val="8E8780"/>
                 </a:solidFill>
               </a:rPr>
               <a:t>사진 3</a:t>
@@ -5935,14 +6168,14 @@
       </p:sp>
       <p:sp>
         <p:nvSpPr>
-          <p:cNvPr id="8" name="사진 자리"/>
+          <p:cNvPr id="9" name="사진 자리"/>
           <p:cNvSpPr/>
           <p:nvPr/>
         </p:nvSpPr>
         <p:spPr>
           <a:xfrm>
-            <a:off x="8960891" y="1554480"/>
-            <a:ext cx="2590723" cy="2103120"/>
+            <a:off x="8960891" y="1783080"/>
+            <a:ext cx="2590723" cy="2194560"/>
           </a:xfrm>
           <a:prstGeom prst="roundRect">
             <a:avLst>
@@ -5953,9 +6186,7 @@
             <a:srgbClr val="DBD1FA"/>
           </a:solidFill>
           <a:ln w="19050">
-            <a:solidFill>
-              <a:srgbClr val="4D26C5"/>
-            </a:solidFill>
+            <a:noFill/>
             <a:prstDash val="dash"/>
           </a:ln>
         </p:spPr>
@@ -5973,7 +6204,7 @@
             <a:r>
               <a:rPr sz="1200" b="0" i="0">
                 <a:solidFill>
-                  <a:srgbClr val="24115F"/>
+                  <a:srgbClr val="8E8780"/>
                 </a:solidFill>
               </a:rPr>
               <a:t>사진 4</a:t>
@@ -5983,14 +6214,14 @@
       </p:sp>
       <p:sp>
         <p:nvSpPr>
-          <p:cNvPr id="9" name="사진 자리"/>
+          <p:cNvPr id="10" name="사진 자리"/>
           <p:cNvSpPr/>
           <p:nvPr/>
         </p:nvSpPr>
         <p:spPr>
           <a:xfrm>
-            <a:off x="640080" y="3840480"/>
-            <a:ext cx="2590723" cy="2103120"/>
+            <a:off x="640080" y="4160520"/>
+            <a:ext cx="2590723" cy="2194560"/>
           </a:xfrm>
           <a:prstGeom prst="roundRect">
             <a:avLst>
@@ -6001,9 +6232,7 @@
             <a:srgbClr val="DBD1FA"/>
           </a:solidFill>
           <a:ln w="19050">
-            <a:solidFill>
-              <a:srgbClr val="4D26C5"/>
-            </a:solidFill>
+            <a:noFill/>
             <a:prstDash val="dash"/>
           </a:ln>
         </p:spPr>
@@ -6021,7 +6250,7 @@
             <a:r>
               <a:rPr sz="1200" b="0" i="0">
                 <a:solidFill>
-                  <a:srgbClr val="24115F"/>
+                  <a:srgbClr val="8E8780"/>
                 </a:solidFill>
               </a:rPr>
               <a:t>사진 5</a:t>
@@ -6031,14 +6260,14 @@
       </p:sp>
       <p:sp>
         <p:nvSpPr>
-          <p:cNvPr id="10" name="사진 자리"/>
+          <p:cNvPr id="11" name="사진 자리"/>
           <p:cNvSpPr/>
           <p:nvPr/>
         </p:nvSpPr>
         <p:spPr>
           <a:xfrm>
-            <a:off x="3413683" y="3840480"/>
-            <a:ext cx="2590723" cy="2103120"/>
+            <a:off x="3413683" y="4160520"/>
+            <a:ext cx="2590723" cy="2194560"/>
           </a:xfrm>
           <a:prstGeom prst="roundRect">
             <a:avLst>
@@ -6049,9 +6278,7 @@
             <a:srgbClr val="DBD1FA"/>
           </a:solidFill>
           <a:ln w="19050">
-            <a:solidFill>
-              <a:srgbClr val="4D26C5"/>
-            </a:solidFill>
+            <a:noFill/>
             <a:prstDash val="dash"/>
           </a:ln>
         </p:spPr>
@@ -6069,7 +6296,7 @@
             <a:r>
               <a:rPr sz="1200" b="0" i="0">
                 <a:solidFill>
-                  <a:srgbClr val="24115F"/>
+                  <a:srgbClr val="8E8780"/>
                 </a:solidFill>
               </a:rPr>
               <a:t>사진 6</a:t>
@@ -6079,14 +6306,14 @@
       </p:sp>
       <p:sp>
         <p:nvSpPr>
-          <p:cNvPr id="11" name="사진 자리"/>
+          <p:cNvPr id="12" name="사진 자리"/>
           <p:cNvSpPr/>
           <p:nvPr/>
         </p:nvSpPr>
         <p:spPr>
           <a:xfrm>
-            <a:off x="6187287" y="3840480"/>
-            <a:ext cx="2590723" cy="2103120"/>
+            <a:off x="6187287" y="4160520"/>
+            <a:ext cx="2590723" cy="2194560"/>
           </a:xfrm>
           <a:prstGeom prst="roundRect">
             <a:avLst>
@@ -6097,9 +6324,7 @@
             <a:srgbClr val="DBD1FA"/>
           </a:solidFill>
           <a:ln w="19050">
-            <a:solidFill>
-              <a:srgbClr val="4D26C5"/>
-            </a:solidFill>
+            <a:noFill/>
             <a:prstDash val="dash"/>
           </a:ln>
         </p:spPr>
@@ -6117,7 +6342,7 @@
             <a:r>
               <a:rPr sz="1200" b="0" i="0">
                 <a:solidFill>
-                  <a:srgbClr val="24115F"/>
+                  <a:srgbClr val="8E8780"/>
                 </a:solidFill>
               </a:rPr>
               <a:t>사진 7</a:t>
@@ -6127,14 +6352,14 @@
       </p:sp>
       <p:sp>
         <p:nvSpPr>
-          <p:cNvPr id="12" name="사진 자리"/>
+          <p:cNvPr id="13" name="사진 자리"/>
           <p:cNvSpPr/>
           <p:nvPr/>
         </p:nvSpPr>
         <p:spPr>
           <a:xfrm>
-            <a:off x="8960891" y="3840480"/>
-            <a:ext cx="2590723" cy="2103120"/>
+            <a:off x="8960891" y="4160520"/>
+            <a:ext cx="2590723" cy="2194560"/>
           </a:xfrm>
           <a:prstGeom prst="roundRect">
             <a:avLst>
@@ -6145,9 +6370,7 @@
             <a:srgbClr val="DBD1FA"/>
           </a:solidFill>
           <a:ln w="19050">
-            <a:solidFill>
-              <a:srgbClr val="4D26C5"/>
-            </a:solidFill>
+            <a:noFill/>
             <a:prstDash val="dash"/>
           </a:ln>
         </p:spPr>
@@ -6165,7 +6388,7 @@
             <a:r>
               <a:rPr sz="1200" b="0" i="0">
                 <a:solidFill>
-                  <a:srgbClr val="24115F"/>
+                  <a:srgbClr val="8E8780"/>
                 </a:solidFill>
               </a:rPr>
               <a:t>사진 8</a:t>
@@ -6184,6 +6407,14 @@
 <file path=ppt/slides/slide6.xml><?xml version="1.0" encoding="utf-8"?>
 <p:sld xmlns:a="http://schemas.openxmlformats.org/drawingml/2006/main" xmlns:p="http://schemas.openxmlformats.org/presentationml/2006/main" xmlns:r="http://schemas.openxmlformats.org/officeDocument/2006/relationships">
   <p:cSld>
+    <p:bg>
+      <p:bgPr>
+        <a:solidFill>
+          <a:srgbClr val="EFEAFD"/>
+        </a:solidFill>
+        <a:effectLst/>
+      </p:bgPr>
+    </p:bg>
     <p:spTree>
       <p:nvGrpSpPr>
         <p:cNvPr id="1" name=""/>
@@ -6191,30 +6422,119 @@
         <p:nvPr/>
       </p:nvGrpSpPr>
       <p:grpSpPr/>
-      <p:pic>
-        <p:nvPicPr>
-          <p:cNvPr id="3" name="표지 그림" descr="birthday-15.jpg"/>
-          <p:cNvPicPr>
-            <a:picLocks noChangeAspect="1"/>
-          </p:cNvPicPr>
+      <p:sp>
+        <p:nvSpPr>
+          <p:cNvPr id="3" name="사진 자리"/>
+          <p:cNvSpPr/>
           <p:nvPr/>
-        </p:nvPicPr>
-        <p:blipFill>
-          <a:blip r:embed="rId2"/>
-          <a:stretch>
-            <a:fillRect/>
-          </a:stretch>
-        </p:blipFill>
-        <p:spPr>
-          <a:xfrm>
-            <a:off x="0" y="0"/>
-            <a:ext cx="12191695" cy="6858000"/>
+        </p:nvSpPr>
+        <p:spPr>
+          <a:xfrm>
+            <a:off x="1463003" y="685800"/>
+            <a:ext cx="3169840" cy="5486400"/>
+          </a:xfrm>
+          <a:prstGeom prst="round2SameRect">
+            <a:avLst>
+              <a:gd name="adj1" fmla="val 50000"/>
+              <a:gd name="adj2" fmla="val 0"/>
+            </a:avLst>
+          </a:prstGeom>
+          <a:solidFill>
+            <a:srgbClr val="B8A5F3"/>
+          </a:solidFill>
+          <a:ln>
+            <a:noFill/>
+          </a:ln>
+        </p:spPr>
+        <p:txBody>
+          <a:bodyPr rtlCol="0" anchor="ctr" wrap="square" lIns="54864" rIns="54864" tIns="27432" bIns="27432">
+            <a:noAutofit/>
+          </a:bodyPr>
+          <a:lstStyle/>
+          <a:p>
+            <a:pPr algn="ctr">
+              <a:lnSpc>
+                <a:spcPct val="100000"/>
+              </a:lnSpc>
+            </a:pPr>
+            <a:r>
+              <a:rPr sz="1400" b="0" i="0">
+                <a:solidFill>
+                  <a:srgbClr val="302749"/>
+                </a:solidFill>
+              </a:rPr>
+              <a:t>사진을 넣어 주세요</a:t>
+            </a:r>
+          </a:p>
+        </p:txBody>
+      </p:sp>
+      <p:sp>
+        <p:nvSpPr>
+          <p:cNvPr id="4" name="장식"/>
+          <p:cNvSpPr/>
+          <p:nvPr/>
+        </p:nvSpPr>
+        <p:spPr>
+          <a:xfrm>
+            <a:off x="4358505" y="4251960"/>
+            <a:ext cx="1005840" cy="1005840"/>
+          </a:xfrm>
+          <a:prstGeom prst="ellipse">
+            <a:avLst/>
+          </a:prstGeom>
+          <a:solidFill>
+            <a:srgbClr val="B8A5F3"/>
+          </a:solidFill>
+          <a:ln>
+            <a:noFill/>
+          </a:ln>
+        </p:spPr>
+        <p:txBody>
+          <a:bodyPr rtlCol="0" anchor="ctr"/>
+          <a:lstStyle/>
+          <a:p>
+            <a:pPr algn="ctr"/>
+          </a:p>
+        </p:txBody>
+      </p:sp>
+      <p:sp>
+        <p:nvSpPr>
+          <p:cNvPr id="5" name="라벨"/>
+          <p:cNvSpPr txBox="1"/>
+          <p:nvPr/>
+        </p:nvSpPr>
+        <p:spPr>
+          <a:xfrm>
+            <a:off x="6827349" y="2148840"/>
+            <a:ext cx="4632844" cy="274320"/>
           </a:xfrm>
           <a:prstGeom prst="rect">
             <a:avLst/>
           </a:prstGeom>
-        </p:spPr>
-      </p:pic>
+          <a:noFill/>
+        </p:spPr>
+        <p:txBody>
+          <a:bodyPr wrap="square" lIns="54864" rIns="54864" tIns="27432" bIns="27432" anchor="t">
+            <a:noAutofit/>
+          </a:bodyPr>
+          <a:lstStyle/>
+          <a:p>
+            <a:pPr algn="l">
+              <a:lnSpc>
+                <a:spcPct val="115000"/>
+              </a:lnSpc>
+            </a:pPr>
+            <a:r>
+              <a:rPr sz="1000" b="1" i="0" spc="250">
+                <a:solidFill>
+                  <a:srgbClr val="26231F"/>
+                </a:solidFill>
+              </a:rPr>
+              <a:t>FIRST BIRTHDAY</a:t>
+            </a:r>
+          </a:p>
+        </p:txBody>
+      </p:sp>
       <p:sp>
         <p:nvSpPr>
           <p:cNvPr id="2" name="Title 1"/>
@@ -6227,8 +6547,8 @@
         </p:nvSpPr>
         <p:spPr>
           <a:xfrm>
-            <a:off x="853418" y="2057400"/>
-            <a:ext cx="6095847" cy="1554480"/>
+            <a:off x="6827349" y="2606040"/>
+            <a:ext cx="4632844" cy="1188720"/>
           </a:xfrm>
         </p:spPr>
         <p:txBody>
@@ -6245,7 +6565,7 @@
             <a:r>
               <a:rPr sz="3400" b="1" i="0">
                 <a:solidFill>
-                  <a:srgbClr val="24115F"/>
+                  <a:srgbClr val="26231F"/>
                 </a:solidFill>
               </a:rPr>
               <a:t>와 주셔서 고맙습니다</a:t>
@@ -6255,14 +6575,14 @@
       </p:sp>
       <p:sp>
         <p:nvSpPr>
-          <p:cNvPr id="4" name="한 줄 문구"/>
+          <p:cNvPr id="6" name="한 줄 문구"/>
           <p:cNvSpPr txBox="1"/>
           <p:nvPr/>
         </p:nvSpPr>
         <p:spPr>
           <a:xfrm>
-            <a:off x="853418" y="3749039"/>
-            <a:ext cx="6095847" cy="822960"/>
+            <a:off x="6827349" y="3886200"/>
+            <a:ext cx="4632844" cy="822960"/>
           </a:xfrm>
           <a:prstGeom prst="rect">
             <a:avLst/>
@@ -6281,9 +6601,9 @@
               </a:lnSpc>
             </a:pPr>
             <a:r>
-              <a:rPr sz="1700" b="0" i="1">
-                <a:solidFill>
-                  <a:srgbClr val="24115F"/>
+              <a:rPr sz="1700" b="0" i="0">
+                <a:solidFill>
+                  <a:srgbClr val="26231F"/>
                 </a:solidFill>
               </a:rPr>
               <a:t>아이가 한 살이 되었습니다</a:t>
@@ -6293,14 +6613,14 @@
       </p:sp>
       <p:sp>
         <p:nvSpPr>
-          <p:cNvPr id="5" name="안내 문구"/>
+          <p:cNvPr id="7" name="안내 문구"/>
           <p:cNvSpPr txBox="1"/>
           <p:nvPr/>
         </p:nvSpPr>
         <p:spPr>
           <a:xfrm>
-            <a:off x="853418" y="4617720"/>
-            <a:ext cx="6095847" cy="914400"/>
+            <a:off x="6827349" y="4754880"/>
+            <a:ext cx="4632844" cy="914400"/>
           </a:xfrm>
           <a:prstGeom prst="rect">
             <a:avLst/>
@@ -6321,7 +6641,7 @@
             <a:r>
               <a:rPr sz="1400" b="0" i="0">
                 <a:solidFill>
-                  <a:srgbClr val="666666"/>
+                  <a:srgbClr val="26231F"/>
                 </a:solidFill>
               </a:rPr>
               <a:t>아기 이름 · 부모 이름</a:t>
@@ -6348,34 +6668,34 @@
         <a:sysClr val="window" lastClr="FFFFFF"/>
       </a:lt1>
       <a:dk2>
-        <a:srgbClr val="24115F"/>
+        <a:srgbClr val="302749"/>
       </a:dk2>
       <a:lt2>
-        <a:srgbClr val="F1EEFC"/>
+        <a:srgbClr val="EFEAFD"/>
       </a:lt2>
       <a:accent1>
-        <a:srgbClr val="4D26C5"/>
+        <a:srgbClr val="977BEA"/>
       </a:accent1>
       <a:accent2>
-        <a:srgbClr val="209DB6"/>
+        <a:srgbClr val="D89FEF"/>
       </a:accent2>
       <a:accent3>
-        <a:srgbClr val="24115F"/>
+        <a:srgbClr val="302749"/>
       </a:accent3>
       <a:accent4>
         <a:srgbClr val="DBD1FA"/>
       </a:accent4>
       <a:accent5>
-        <a:srgbClr val="3662BE"/>
+        <a:srgbClr val="B88DEC"/>
       </a:accent5>
       <a:accent6>
-        <a:srgbClr val="7C709F"/>
+        <a:srgbClr val="837D92"/>
       </a:accent6>
       <a:hlink>
-        <a:srgbClr val="4D26C5"/>
+        <a:srgbClr val="977BEA"/>
       </a:hlink>
       <a:folHlink>
-        <a:srgbClr val="24115F"/>
+        <a:srgbClr val="302749"/>
       </a:folHlink>
     </a:clrScheme>
     <a:fontScheme name="Office">
